--- a/LabBook_020.pptx
+++ b/LabBook_020.pptx
@@ -5,17 +5,21 @@
     <p:sldMasterId id="2147483648" r:id="rId1"/>
   </p:sldMasterIdLst>
   <p:notesMasterIdLst>
-    <p:notesMasterId r:id="rId7"/>
+    <p:notesMasterId r:id="rId11"/>
   </p:notesMasterIdLst>
   <p:handoutMasterIdLst>
-    <p:handoutMasterId r:id="rId8"/>
+    <p:handoutMasterId r:id="rId12"/>
   </p:handoutMasterIdLst>
   <p:sldIdLst>
     <p:sldId id="256" r:id="rId2"/>
     <p:sldId id="289" r:id="rId3"/>
     <p:sldId id="290" r:id="rId4"/>
-    <p:sldId id="293" r:id="rId5"/>
-    <p:sldId id="288" r:id="rId6"/>
+    <p:sldId id="295" r:id="rId5"/>
+    <p:sldId id="296" r:id="rId6"/>
+    <p:sldId id="297" r:id="rId7"/>
+    <p:sldId id="293" r:id="rId8"/>
+    <p:sldId id="288" r:id="rId9"/>
+    <p:sldId id="294" r:id="rId10"/>
   </p:sldIdLst>
   <p:sldSz cx="12192000" cy="6858000"/>
   <p:notesSz cx="12192000" cy="6858000"/>
@@ -297,7 +301,7 @@
           <a:p>
             <a:fld id="{8438F8DC-35B0-48E6-A86E-42F1F08DD00F}" type="datetimeFigureOut">
               <a:rPr lang="es-ES" smtClean="0"/>
-              <a:t>03/02/2026</a:t>
+              <a:t>16/02/2026</a:t>
             </a:fld>
             <a:endParaRPr lang="es-ES"/>
           </a:p>
@@ -474,7 +478,7 @@
           <a:p>
             <a:fld id="{FACBDC12-F39B-4B97-8F4D-6734F9D366FF}" type="datetimeFigureOut">
               <a:rPr lang="es-ES" smtClean="0"/>
-              <a:t>03/02/2026</a:t>
+              <a:t>16/02/2026</a:t>
             </a:fld>
             <a:endParaRPr lang="es-ES"/>
           </a:p>
@@ -914,7 +918,7 @@
           <a:p>
             <a:fld id="{676223B9-C868-4436-87D9-1A3152E1157A}" type="slidenum">
               <a:rPr lang="es-ES" smtClean="0"/>
-              <a:t>4</a:t>
+              <a:t>7</a:t>
             </a:fld>
             <a:endParaRPr lang="es-ES"/>
           </a:p>
@@ -5024,114 +5028,490 @@
           </p:sp>
         </mc:Fallback>
       </mc:AlternateContent>
-      <p:sp>
-        <p:nvSpPr>
-          <p:cNvPr id="2" name="CuadroTexto 1">
-            <a:extLst>
-              <a:ext uri="{FF2B5EF4-FFF2-40B4-BE49-F238E27FC236}">
-                <a16:creationId xmlns:a16="http://schemas.microsoft.com/office/drawing/2014/main" id="{D0F8CF3B-B920-DBFC-F825-0C87B51EADA7}"/>
-              </a:ext>
-            </a:extLst>
-          </p:cNvPr>
-          <p:cNvSpPr txBox="1"/>
-          <p:nvPr/>
-        </p:nvSpPr>
-        <p:spPr>
-          <a:xfrm>
-            <a:off x="609441" y="4860334"/>
-            <a:ext cx="11199971" cy="1200329"/>
-          </a:xfrm>
-          <a:prstGeom prst="rect">
-            <a:avLst/>
-          </a:prstGeom>
-          <a:solidFill>
-            <a:schemeClr val="bg1">
-              <a:lumMod val="95000"/>
-            </a:schemeClr>
-          </a:solidFill>
-          <a:ln w="28575">
-            <a:solidFill>
-              <a:srgbClr val="E0700D"/>
-            </a:solidFill>
-          </a:ln>
-        </p:spPr>
-        <p:txBody>
-          <a:bodyPr wrap="square" rtlCol="0">
-            <a:spAutoFit/>
-          </a:bodyPr>
-          <a:lstStyle/>
-          <a:p>
-            <a:pPr algn="just"/>
-            <a:r>
-              <a:rPr lang="en-US" sz="1200" dirty="0">
-                <a:latin typeface="Arial" panose="020B0604020202020204" pitchFamily="34" charset="0"/>
-                <a:cs typeface="Arial" panose="020B0604020202020204" pitchFamily="34" charset="0"/>
-              </a:rPr>
-              <a:t>Document all your results (neff, plot fields </a:t>
-            </a:r>
-            <a:r>
-              <a:rPr lang="en-US" sz="1200">
-                <a:latin typeface="Arial" panose="020B0604020202020204" pitchFamily="34" charset="0"/>
-                <a:cs typeface="Arial" panose="020B0604020202020204" pitchFamily="34" charset="0"/>
-              </a:rPr>
-              <a:t>of different modes, </a:t>
-            </a:r>
-            <a:r>
-              <a:rPr lang="en-US" sz="1200" dirty="0">
-                <a:latin typeface="Arial" panose="020B0604020202020204" pitchFamily="34" charset="0"/>
-                <a:cs typeface="Arial" panose="020B0604020202020204" pitchFamily="34" charset="0"/>
-              </a:rPr>
-              <a:t>comparison between </a:t>
-            </a:r>
-            <a:r>
-              <a:rPr lang="en-US" sz="1200">
-                <a:latin typeface="Arial" panose="020B0604020202020204" pitchFamily="34" charset="0"/>
-                <a:cs typeface="Arial" panose="020B0604020202020204" pitchFamily="34" charset="0"/>
-              </a:rPr>
-              <a:t>different polarizations…)</a:t>
-            </a:r>
-            <a:endParaRPr lang="en-US" sz="1200" dirty="0">
-              <a:latin typeface="Arial" panose="020B0604020202020204" pitchFamily="34" charset="0"/>
-              <a:cs typeface="Arial" panose="020B0604020202020204" pitchFamily="34" charset="0"/>
-            </a:endParaRPr>
-          </a:p>
-          <a:p>
-            <a:pPr algn="just"/>
-            <a:endParaRPr lang="en-US" sz="1200" dirty="0">
-              <a:latin typeface="Arial" panose="020B0604020202020204" pitchFamily="34" charset="0"/>
-              <a:cs typeface="Arial" panose="020B0604020202020204" pitchFamily="34" charset="0"/>
-            </a:endParaRPr>
-          </a:p>
-          <a:p>
-            <a:pPr algn="just"/>
-            <a:endParaRPr lang="en-US" sz="1200" dirty="0">
-              <a:latin typeface="Arial" panose="020B0604020202020204" pitchFamily="34" charset="0"/>
-              <a:cs typeface="Arial" panose="020B0604020202020204" pitchFamily="34" charset="0"/>
-            </a:endParaRPr>
-          </a:p>
-          <a:p>
-            <a:pPr algn="just"/>
-            <a:endParaRPr lang="en-US" sz="1200" dirty="0">
-              <a:latin typeface="Arial" panose="020B0604020202020204" pitchFamily="34" charset="0"/>
-              <a:cs typeface="Arial" panose="020B0604020202020204" pitchFamily="34" charset="0"/>
-            </a:endParaRPr>
-          </a:p>
-          <a:p>
-            <a:pPr algn="just"/>
-            <a:endParaRPr lang="en-US" sz="1200" dirty="0">
-              <a:latin typeface="Arial" panose="020B0604020202020204" pitchFamily="34" charset="0"/>
-              <a:cs typeface="Arial" panose="020B0604020202020204" pitchFamily="34" charset="0"/>
-            </a:endParaRPr>
-          </a:p>
-          <a:p>
-            <a:pPr algn="just"/>
-            <a:endParaRPr lang="en-US" sz="1200" dirty="0">
-              <a:latin typeface="Arial" panose="020B0604020202020204" pitchFamily="34" charset="0"/>
-              <a:cs typeface="Arial" panose="020B0604020202020204" pitchFamily="34" charset="0"/>
-            </a:endParaRPr>
-          </a:p>
-        </p:txBody>
-      </p:sp>
+      <mc:AlternateContent xmlns:mc="http://schemas.openxmlformats.org/markup-compatibility/2006">
+        <mc:Choice xmlns:a14="http://schemas.microsoft.com/office/drawing/2010/main" Requires="a14">
+          <p:sp>
+            <p:nvSpPr>
+              <p:cNvPr id="2" name="CuadroTexto 1">
+                <a:extLst>
+                  <a:ext uri="{FF2B5EF4-FFF2-40B4-BE49-F238E27FC236}">
+                    <a16:creationId xmlns:a16="http://schemas.microsoft.com/office/drawing/2014/main" id="{D0F8CF3B-B920-DBFC-F825-0C87B51EADA7}"/>
+                  </a:ext>
+                </a:extLst>
+              </p:cNvPr>
+              <p:cNvSpPr txBox="1"/>
+              <p:nvPr/>
+            </p:nvSpPr>
+            <p:spPr>
+              <a:xfrm>
+                <a:off x="543456" y="3774468"/>
+                <a:ext cx="11199971" cy="2308324"/>
+              </a:xfrm>
+              <a:prstGeom prst="rect">
+                <a:avLst/>
+              </a:prstGeom>
+              <a:solidFill>
+                <a:schemeClr val="bg1">
+                  <a:lumMod val="95000"/>
+                </a:schemeClr>
+              </a:solidFill>
+              <a:ln w="28575">
+                <a:solidFill>
+                  <a:srgbClr val="E0700D"/>
+                </a:solidFill>
+              </a:ln>
+            </p:spPr>
+            <p:txBody>
+              <a:bodyPr wrap="square" rtlCol="0">
+                <a:spAutoFit/>
+              </a:bodyPr>
+              <a:lstStyle/>
+              <a:p>
+                <a:pPr algn="just"/>
+                <a:r>
+                  <a:rPr lang="en-US" sz="1200" dirty="0">
+                    <a:latin typeface="Arial" panose="020B0604020202020204" pitchFamily="34" charset="0"/>
+                    <a:cs typeface="Arial" panose="020B0604020202020204" pitchFamily="34" charset="0"/>
+                  </a:rPr>
+                  <a:t>Document all your results (neff, plot fields of different modes, comparison between different polarizations…)</a:t>
+                </a:r>
+              </a:p>
+              <a:p>
+                <a:pPr algn="just"/>
+                <a:endParaRPr lang="en-US" sz="1200" dirty="0">
+                  <a:latin typeface="Arial" panose="020B0604020202020204" pitchFamily="34" charset="0"/>
+                  <a:cs typeface="Arial" panose="020B0604020202020204" pitchFamily="34" charset="0"/>
+                </a:endParaRPr>
+              </a:p>
+              <a:p>
+                <a:pPr algn="just"/>
+                <a:r>
+                  <a:rPr lang="en-US" sz="1200" dirty="0">
+                    <a:latin typeface="Arial" panose="020B0604020202020204" pitchFamily="34" charset="0"/>
+                    <a:cs typeface="Arial" panose="020B0604020202020204" pitchFamily="34" charset="0"/>
+                  </a:rPr>
+                  <a:t>Para </a:t>
+                </a:r>
+                <a:r>
+                  <a:rPr lang="en-US" sz="1200" dirty="0" err="1">
+                    <a:latin typeface="Arial" panose="020B0604020202020204" pitchFamily="34" charset="0"/>
+                    <a:cs typeface="Arial" panose="020B0604020202020204" pitchFamily="34" charset="0"/>
+                  </a:rPr>
+                  <a:t>obtener</a:t>
+                </a:r>
+                <a:r>
+                  <a:rPr lang="en-US" sz="1200" dirty="0">
+                    <a:latin typeface="Arial" panose="020B0604020202020204" pitchFamily="34" charset="0"/>
+                    <a:cs typeface="Arial" panose="020B0604020202020204" pitchFamily="34" charset="0"/>
+                  </a:rPr>
+                  <a:t> la longitude de batido </a:t>
+                </a:r>
+                <a14:m>
+                  <m:oMath xmlns:m="http://schemas.openxmlformats.org/officeDocument/2006/math">
+                    <m:sSub>
+                      <m:sSubPr>
+                        <m:ctrlPr>
+                          <a:rPr lang="es-ES" sz="1200" b="0" i="1" smtClean="0">
+                            <a:latin typeface="Cambria Math" panose="02040503050406030204" pitchFamily="18" charset="0"/>
+                          </a:rPr>
+                        </m:ctrlPr>
+                      </m:sSubPr>
+                      <m:e>
+                        <m:r>
+                          <a:rPr lang="es-ES" sz="1200" b="0" i="1" smtClean="0">
+                            <a:latin typeface="Cambria Math" panose="02040503050406030204" pitchFamily="18" charset="0"/>
+                          </a:rPr>
+                          <m:t>𝐿</m:t>
+                        </m:r>
+                      </m:e>
+                      <m:sub>
+                        <m:r>
+                          <a:rPr lang="es-ES" sz="1200" b="0" i="1" smtClean="0">
+                            <a:latin typeface="Cambria Math" panose="02040503050406030204" pitchFamily="18" charset="0"/>
+                          </a:rPr>
+                          <m:t>𝜋</m:t>
+                        </m:r>
+                      </m:sub>
+                    </m:sSub>
+                  </m:oMath>
+                </a14:m>
+                <a:r>
+                  <a:rPr lang="en-US" sz="1200" dirty="0">
+                    <a:latin typeface="Arial" panose="020B0604020202020204" pitchFamily="34" charset="0"/>
+                    <a:cs typeface="Arial" panose="020B0604020202020204" pitchFamily="34" charset="0"/>
+                  </a:rPr>
+                  <a:t> se </a:t>
+                </a:r>
+                <a:r>
+                  <a:rPr lang="en-US" sz="1200" dirty="0" err="1">
+                    <a:latin typeface="Arial" panose="020B0604020202020204" pitchFamily="34" charset="0"/>
+                    <a:cs typeface="Arial" panose="020B0604020202020204" pitchFamily="34" charset="0"/>
+                  </a:rPr>
+                  <a:t>tiene</a:t>
+                </a:r>
+                <a:r>
+                  <a:rPr lang="en-US" sz="1200" dirty="0">
+                    <a:latin typeface="Arial" panose="020B0604020202020204" pitchFamily="34" charset="0"/>
+                    <a:cs typeface="Arial" panose="020B0604020202020204" pitchFamily="34" charset="0"/>
+                  </a:rPr>
+                  <a:t> que usar la </a:t>
+                </a:r>
+                <a:r>
+                  <a:rPr lang="en-US" sz="1200" dirty="0" err="1">
+                    <a:latin typeface="Arial" panose="020B0604020202020204" pitchFamily="34" charset="0"/>
+                    <a:cs typeface="Arial" panose="020B0604020202020204" pitchFamily="34" charset="0"/>
+                  </a:rPr>
+                  <a:t>diferencia</a:t>
+                </a:r>
+                <a:r>
+                  <a:rPr lang="en-US" sz="1200" dirty="0">
+                    <a:latin typeface="Arial" panose="020B0604020202020204" pitchFamily="34" charset="0"/>
+                    <a:cs typeface="Arial" panose="020B0604020202020204" pitchFamily="34" charset="0"/>
+                  </a:rPr>
+                  <a:t> entre los </a:t>
+                </a:r>
+                <a:r>
+                  <a:rPr lang="en-US" sz="1200" dirty="0" err="1">
+                    <a:latin typeface="Arial" panose="020B0604020202020204" pitchFamily="34" charset="0"/>
+                    <a:cs typeface="Arial" panose="020B0604020202020204" pitchFamily="34" charset="0"/>
+                  </a:rPr>
+                  <a:t>índices</a:t>
+                </a:r>
+                <a:r>
+                  <a:rPr lang="en-US" sz="1200" dirty="0">
+                    <a:latin typeface="Arial" panose="020B0604020202020204" pitchFamily="34" charset="0"/>
+                    <a:cs typeface="Arial" panose="020B0604020202020204" pitchFamily="34" charset="0"/>
+                  </a:rPr>
+                  <a:t> </a:t>
+                </a:r>
+                <a:r>
+                  <a:rPr lang="en-US" sz="1200" dirty="0" err="1">
+                    <a:latin typeface="Arial" panose="020B0604020202020204" pitchFamily="34" charset="0"/>
+                    <a:cs typeface="Arial" panose="020B0604020202020204" pitchFamily="34" charset="0"/>
+                  </a:rPr>
+                  <a:t>efectivos</a:t>
+                </a:r>
+                <a:r>
+                  <a:rPr lang="en-US" sz="1200" dirty="0">
+                    <a:latin typeface="Arial" panose="020B0604020202020204" pitchFamily="34" charset="0"/>
+                    <a:cs typeface="Arial" panose="020B0604020202020204" pitchFamily="34" charset="0"/>
+                  </a:rPr>
+                  <a:t> de los </a:t>
+                </a:r>
+                <a:r>
+                  <a:rPr lang="en-US" sz="1200" dirty="0" err="1">
+                    <a:latin typeface="Arial" panose="020B0604020202020204" pitchFamily="34" charset="0"/>
+                    <a:cs typeface="Arial" panose="020B0604020202020204" pitchFamily="34" charset="0"/>
+                  </a:rPr>
+                  <a:t>supermodos</a:t>
+                </a:r>
+                <a:r>
+                  <a:rPr lang="en-US" sz="1200" dirty="0">
+                    <a:latin typeface="Arial" panose="020B0604020202020204" pitchFamily="34" charset="0"/>
+                    <a:cs typeface="Arial" panose="020B0604020202020204" pitchFamily="34" charset="0"/>
+                  </a:rPr>
+                  <a:t> pares e </a:t>
+                </a:r>
+                <a:r>
+                  <a:rPr lang="en-US" sz="1200" dirty="0" err="1">
+                    <a:latin typeface="Arial" panose="020B0604020202020204" pitchFamily="34" charset="0"/>
+                    <a:cs typeface="Arial" panose="020B0604020202020204" pitchFamily="34" charset="0"/>
+                  </a:rPr>
+                  <a:t>impares</a:t>
+                </a:r>
+                <a:r>
+                  <a:rPr lang="en-US" sz="1200" dirty="0">
+                    <a:latin typeface="Arial" panose="020B0604020202020204" pitchFamily="34" charset="0"/>
+                    <a:cs typeface="Arial" panose="020B0604020202020204" pitchFamily="34" charset="0"/>
+                  </a:rPr>
+                  <a:t> de la </a:t>
+                </a:r>
+                <a:r>
+                  <a:rPr lang="en-US" sz="1200" dirty="0" err="1">
+                    <a:latin typeface="Arial" panose="020B0604020202020204" pitchFamily="34" charset="0"/>
+                    <a:cs typeface="Arial" panose="020B0604020202020204" pitchFamily="34" charset="0"/>
+                  </a:rPr>
+                  <a:t>sección</a:t>
+                </a:r>
+                <a:r>
+                  <a:rPr lang="en-US" sz="1200" dirty="0">
+                    <a:latin typeface="Arial" panose="020B0604020202020204" pitchFamily="34" charset="0"/>
+                    <a:cs typeface="Arial" panose="020B0604020202020204" pitchFamily="34" charset="0"/>
+                  </a:rPr>
+                  <a:t> </a:t>
+                </a:r>
+                <a:r>
+                  <a:rPr lang="en-US" sz="1200" dirty="0" err="1">
+                    <a:latin typeface="Arial" panose="020B0604020202020204" pitchFamily="34" charset="0"/>
+                    <a:cs typeface="Arial" panose="020B0604020202020204" pitchFamily="34" charset="0"/>
+                  </a:rPr>
+                  <a:t>cruzada</a:t>
+                </a:r>
+                <a:r>
+                  <a:rPr lang="en-US" sz="1200" dirty="0">
+                    <a:latin typeface="Arial" panose="020B0604020202020204" pitchFamily="34" charset="0"/>
+                    <a:cs typeface="Arial" panose="020B0604020202020204" pitchFamily="34" charset="0"/>
+                  </a:rPr>
+                  <a:t>. </a:t>
+                </a:r>
+                <a:r>
+                  <a:rPr lang="en-US" sz="1200" dirty="0" err="1">
+                    <a:latin typeface="Arial" panose="020B0604020202020204" pitchFamily="34" charset="0"/>
+                    <a:cs typeface="Arial" panose="020B0604020202020204" pitchFamily="34" charset="0"/>
+                  </a:rPr>
+                  <a:t>Esto</a:t>
+                </a:r>
+                <a:r>
+                  <a:rPr lang="en-US" sz="1200" dirty="0">
+                    <a:latin typeface="Arial" panose="020B0604020202020204" pitchFamily="34" charset="0"/>
+                    <a:cs typeface="Arial" panose="020B0604020202020204" pitchFamily="34" charset="0"/>
+                  </a:rPr>
+                  <a:t> se </a:t>
+                </a:r>
+                <a:r>
+                  <a:rPr lang="en-US" sz="1200" dirty="0" err="1">
+                    <a:latin typeface="Arial" panose="020B0604020202020204" pitchFamily="34" charset="0"/>
+                    <a:cs typeface="Arial" panose="020B0604020202020204" pitchFamily="34" charset="0"/>
+                  </a:rPr>
+                  <a:t>hace</a:t>
+                </a:r>
+                <a:r>
+                  <a:rPr lang="en-US" sz="1200" dirty="0">
+                    <a:latin typeface="Arial" panose="020B0604020202020204" pitchFamily="34" charset="0"/>
+                    <a:cs typeface="Arial" panose="020B0604020202020204" pitchFamily="34" charset="0"/>
+                  </a:rPr>
+                  <a:t> tanto para </a:t>
+                </a:r>
+                <a:r>
+                  <a:rPr lang="en-US" sz="1200" dirty="0" err="1">
+                    <a:latin typeface="Arial" panose="020B0604020202020204" pitchFamily="34" charset="0"/>
+                    <a:cs typeface="Arial" panose="020B0604020202020204" pitchFamily="34" charset="0"/>
+                  </a:rPr>
+                  <a:t>el</a:t>
+                </a:r>
+                <a:r>
+                  <a:rPr lang="en-US" sz="1200" dirty="0">
+                    <a:latin typeface="Arial" panose="020B0604020202020204" pitchFamily="34" charset="0"/>
+                    <a:cs typeface="Arial" panose="020B0604020202020204" pitchFamily="34" charset="0"/>
+                  </a:rPr>
+                  <a:t> modo TE </a:t>
+                </a:r>
+                <a:r>
+                  <a:rPr lang="en-US" sz="1200" dirty="0" err="1">
+                    <a:latin typeface="Arial" panose="020B0604020202020204" pitchFamily="34" charset="0"/>
+                    <a:cs typeface="Arial" panose="020B0604020202020204" pitchFamily="34" charset="0"/>
+                  </a:rPr>
+                  <a:t>como</a:t>
+                </a:r>
+                <a:r>
+                  <a:rPr lang="en-US" sz="1200" dirty="0">
+                    <a:latin typeface="Arial" panose="020B0604020202020204" pitchFamily="34" charset="0"/>
+                    <a:cs typeface="Arial" panose="020B0604020202020204" pitchFamily="34" charset="0"/>
+                  </a:rPr>
+                  <a:t> para </a:t>
+                </a:r>
+                <a:r>
+                  <a:rPr lang="en-US" sz="1200" dirty="0" err="1">
+                    <a:latin typeface="Arial" panose="020B0604020202020204" pitchFamily="34" charset="0"/>
+                    <a:cs typeface="Arial" panose="020B0604020202020204" pitchFamily="34" charset="0"/>
+                  </a:rPr>
+                  <a:t>el</a:t>
+                </a:r>
+                <a:r>
+                  <a:rPr lang="en-US" sz="1200" dirty="0">
+                    <a:latin typeface="Arial" panose="020B0604020202020204" pitchFamily="34" charset="0"/>
+                    <a:cs typeface="Arial" panose="020B0604020202020204" pitchFamily="34" charset="0"/>
+                  </a:rPr>
+                  <a:t> modo TM. La formula para </a:t>
+                </a:r>
+                <a:r>
+                  <a:rPr lang="en-US" sz="1200" dirty="0" err="1">
+                    <a:latin typeface="Arial" panose="020B0604020202020204" pitchFamily="34" charset="0"/>
+                    <a:cs typeface="Arial" panose="020B0604020202020204" pitchFamily="34" charset="0"/>
+                  </a:rPr>
+                  <a:t>hallar</a:t>
+                </a:r>
+                <a:r>
+                  <a:rPr lang="en-US" sz="1200" dirty="0">
+                    <a:latin typeface="Arial" panose="020B0604020202020204" pitchFamily="34" charset="0"/>
+                    <a:cs typeface="Arial" panose="020B0604020202020204" pitchFamily="34" charset="0"/>
+                  </a:rPr>
+                  <a:t> la longitude de batido es </a:t>
+                </a:r>
+                <a:r>
+                  <a:rPr lang="en-US" sz="1200" dirty="0">
+                    <a:latin typeface="Arial" panose="020B0604020202020204" pitchFamily="34" charset="0"/>
+                    <a:cs typeface="Arial" panose="020B0604020202020204" pitchFamily="34" charset="0"/>
+                    <a:sym typeface="Wingdings" panose="05000000000000000000" pitchFamily="2" charset="2"/>
+                  </a:rPr>
+                  <a:t> </a:t>
+                </a:r>
+                <a:r>
+                  <a:rPr lang="en-US" sz="1200" dirty="0" err="1">
+                    <a:latin typeface="Arial" panose="020B0604020202020204" pitchFamily="34" charset="0"/>
+                    <a:cs typeface="Arial" panose="020B0604020202020204" pitchFamily="34" charset="0"/>
+                  </a:rPr>
+                  <a:t>L_pi</a:t>
+                </a:r>
+                <a:r>
+                  <a:rPr lang="en-US" sz="1200" dirty="0">
+                    <a:latin typeface="Arial" panose="020B0604020202020204" pitchFamily="34" charset="0"/>
+                    <a:cs typeface="Arial" panose="020B0604020202020204" pitchFamily="34" charset="0"/>
+                  </a:rPr>
+                  <a:t> = 0.5*</a:t>
+                </a:r>
+                <a:r>
+                  <a:rPr lang="en-US" sz="1200" dirty="0" err="1">
+                    <a:latin typeface="Arial" panose="020B0604020202020204" pitchFamily="34" charset="0"/>
+                    <a:cs typeface="Arial" panose="020B0604020202020204" pitchFamily="34" charset="0"/>
+                  </a:rPr>
+                  <a:t>lambda_c</a:t>
+                </a:r>
+                <a:r>
+                  <a:rPr lang="en-US" sz="1200" dirty="0">
+                    <a:latin typeface="Arial" panose="020B0604020202020204" pitchFamily="34" charset="0"/>
+                    <a:cs typeface="Arial" panose="020B0604020202020204" pitchFamily="34" charset="0"/>
+                  </a:rPr>
+                  <a:t>/(</a:t>
+                </a:r>
+                <a:r>
+                  <a:rPr lang="pt-BR" sz="1200" dirty="0" err="1">
+                    <a:latin typeface="Arial" panose="020B0604020202020204" pitchFamily="34" charset="0"/>
+                    <a:cs typeface="Arial" panose="020B0604020202020204" pitchFamily="34" charset="0"/>
+                  </a:rPr>
+                  <a:t>n_e</a:t>
+                </a:r>
+                <a:r>
+                  <a:rPr lang="pt-BR" sz="1200" dirty="0">
+                    <a:latin typeface="Arial" panose="020B0604020202020204" pitchFamily="34" charset="0"/>
+                    <a:cs typeface="Arial" panose="020B0604020202020204" pitchFamily="34" charset="0"/>
+                  </a:rPr>
+                  <a:t> - </a:t>
+                </a:r>
+                <a:r>
+                  <a:rPr lang="pt-BR" sz="1200" dirty="0" err="1">
+                    <a:latin typeface="Arial" panose="020B0604020202020204" pitchFamily="34" charset="0"/>
+                    <a:cs typeface="Arial" panose="020B0604020202020204" pitchFamily="34" charset="0"/>
+                  </a:rPr>
+                  <a:t>n_o</a:t>
+                </a:r>
+                <a:r>
+                  <a:rPr lang="en-US" sz="1200" dirty="0">
+                    <a:latin typeface="Arial" panose="020B0604020202020204" pitchFamily="34" charset="0"/>
+                    <a:cs typeface="Arial" panose="020B0604020202020204" pitchFamily="34" charset="0"/>
+                  </a:rPr>
+                  <a:t>)</a:t>
+                </a:r>
+              </a:p>
+              <a:p>
+                <a:pPr algn="just"/>
+                <a:endParaRPr lang="en-US" sz="1200" dirty="0">
+                  <a:latin typeface="Arial" panose="020B0604020202020204" pitchFamily="34" charset="0"/>
+                  <a:cs typeface="Arial" panose="020B0604020202020204" pitchFamily="34" charset="0"/>
+                </a:endParaRPr>
+              </a:p>
+              <a:p>
+                <a:pPr algn="just"/>
+                <a:endParaRPr lang="en-US" sz="1200" dirty="0">
+                  <a:latin typeface="Arial" panose="020B0604020202020204" pitchFamily="34" charset="0"/>
+                  <a:cs typeface="Arial" panose="020B0604020202020204" pitchFamily="34" charset="0"/>
+                </a:endParaRPr>
+              </a:p>
+              <a:p>
+                <a:pPr algn="just"/>
+                <a:endParaRPr lang="en-US" sz="1200" dirty="0">
+                  <a:latin typeface="Arial" panose="020B0604020202020204" pitchFamily="34" charset="0"/>
+                  <a:cs typeface="Arial" panose="020B0604020202020204" pitchFamily="34" charset="0"/>
+                </a:endParaRPr>
+              </a:p>
+              <a:p>
+                <a:pPr algn="just"/>
+                <a:endParaRPr lang="en-US" sz="1200" dirty="0">
+                  <a:latin typeface="Arial" panose="020B0604020202020204" pitchFamily="34" charset="0"/>
+                  <a:cs typeface="Arial" panose="020B0604020202020204" pitchFamily="34" charset="0"/>
+                </a:endParaRPr>
+              </a:p>
+              <a:p>
+                <a:pPr algn="just"/>
+                <a:endParaRPr lang="en-US" sz="1200" dirty="0">
+                  <a:latin typeface="Arial" panose="020B0604020202020204" pitchFamily="34" charset="0"/>
+                  <a:cs typeface="Arial" panose="020B0604020202020204" pitchFamily="34" charset="0"/>
+                </a:endParaRPr>
+              </a:p>
+              <a:p>
+                <a:pPr algn="just"/>
+                <a:endParaRPr lang="en-US" sz="1200" dirty="0">
+                  <a:latin typeface="Arial" panose="020B0604020202020204" pitchFamily="34" charset="0"/>
+                  <a:cs typeface="Arial" panose="020B0604020202020204" pitchFamily="34" charset="0"/>
+                </a:endParaRPr>
+              </a:p>
+              <a:p>
+                <a:pPr algn="just"/>
+                <a:endParaRPr lang="en-US" sz="1200" dirty="0">
+                  <a:latin typeface="Arial" panose="020B0604020202020204" pitchFamily="34" charset="0"/>
+                  <a:cs typeface="Arial" panose="020B0604020202020204" pitchFamily="34" charset="0"/>
+                </a:endParaRPr>
+              </a:p>
+              <a:p>
+                <a:pPr algn="just"/>
+                <a:endParaRPr lang="en-US" sz="1200" dirty="0">
+                  <a:latin typeface="Arial" panose="020B0604020202020204" pitchFamily="34" charset="0"/>
+                  <a:cs typeface="Arial" panose="020B0604020202020204" pitchFamily="34" charset="0"/>
+                </a:endParaRPr>
+              </a:p>
+            </p:txBody>
+          </p:sp>
+        </mc:Choice>
+        <mc:Fallback>
+          <p:sp>
+            <p:nvSpPr>
+              <p:cNvPr id="2" name="CuadroTexto 1">
+                <a:extLst>
+                  <a:ext uri="{FF2B5EF4-FFF2-40B4-BE49-F238E27FC236}">
+                    <a16:creationId xmlns:a16="http://schemas.microsoft.com/office/drawing/2014/main" id="{D0F8CF3B-B920-DBFC-F825-0C87B51EADA7}"/>
+                  </a:ext>
+                </a:extLst>
+              </p:cNvPr>
+              <p:cNvSpPr txBox="1">
+                <a:spLocks noRot="1" noChangeAspect="1" noMove="1" noResize="1" noEditPoints="1" noAdjustHandles="1" noChangeArrowheads="1" noChangeShapeType="1" noTextEdit="1"/>
+              </p:cNvSpPr>
+              <p:nvPr/>
+            </p:nvSpPr>
+            <p:spPr>
+              <a:xfrm>
+                <a:off x="543456" y="3774468"/>
+                <a:ext cx="11199971" cy="2308324"/>
+              </a:xfrm>
+              <a:prstGeom prst="rect">
+                <a:avLst/>
+              </a:prstGeom>
+              <a:blipFill>
+                <a:blip r:embed="rId6"/>
+                <a:stretch>
+                  <a:fillRect/>
+                </a:stretch>
+              </a:blipFill>
+              <a:ln w="28575">
+                <a:solidFill>
+                  <a:srgbClr val="E0700D"/>
+                </a:solidFill>
+              </a:ln>
+            </p:spPr>
+            <p:txBody>
+              <a:bodyPr/>
+              <a:lstStyle/>
+              <a:p>
+                <a:r>
+                  <a:rPr lang="es-ES">
+                    <a:noFill/>
+                  </a:rPr>
+                  <a:t> </a:t>
+                </a:r>
+              </a:p>
+            </p:txBody>
+          </p:sp>
+        </mc:Fallback>
+      </mc:AlternateContent>
     </p:spTree>
     <p:extLst>
       <p:ext uri="{BB962C8B-B14F-4D97-AF65-F5344CB8AC3E}">
@@ -5146,6 +5526,1041 @@
 </file>
 
 <file path=ppt/slides/slide4.xml><?xml version="1.0" encoding="utf-8"?>
+<p:sld xmlns:a="http://schemas.openxmlformats.org/drawingml/2006/main" xmlns:r="http://schemas.openxmlformats.org/officeDocument/2006/relationships" xmlns:p="http://schemas.openxmlformats.org/presentationml/2006/main">
+  <p:cSld>
+    <p:spTree>
+      <p:nvGrpSpPr>
+        <p:cNvPr id="1" name=""/>
+        <p:cNvGrpSpPr/>
+        <p:nvPr/>
+      </p:nvGrpSpPr>
+      <p:grpSpPr>
+        <a:xfrm>
+          <a:off x="0" y="0"/>
+          <a:ext cx="0" cy="0"/>
+          <a:chOff x="0" y="0"/>
+          <a:chExt cx="0" cy="0"/>
+        </a:xfrm>
+      </p:grpSpPr>
+      <p:sp>
+        <p:nvSpPr>
+          <p:cNvPr id="3" name="Marcador de texto 2">
+            <a:extLst>
+              <a:ext uri="{FF2B5EF4-FFF2-40B4-BE49-F238E27FC236}">
+                <a16:creationId xmlns:a16="http://schemas.microsoft.com/office/drawing/2014/main" id="{CBD5F6C9-C94E-4972-A435-0A8F21321D59}"/>
+              </a:ext>
+            </a:extLst>
+          </p:cNvPr>
+          <p:cNvSpPr>
+            <a:spLocks noGrp="1"/>
+          </p:cNvSpPr>
+          <p:nvPr>
+            <p:ph type="body" idx="1"/>
+          </p:nvPr>
+        </p:nvSpPr>
+        <p:spPr>
+          <a:xfrm>
+            <a:off x="609600" y="914400"/>
+            <a:ext cx="10972800" cy="1661993"/>
+          </a:xfrm>
+        </p:spPr>
+        <p:txBody>
+          <a:bodyPr/>
+          <a:lstStyle/>
+          <a:p>
+            <a:r>
+              <a:rPr lang="es-ES" sz="1200" dirty="0"/>
+              <a:t>Índices efectivos para los 6 primeros modos:</a:t>
+            </a:r>
+          </a:p>
+          <a:p>
+            <a:r>
+              <a:rPr lang="es-ES" sz="1200" dirty="0"/>
+              <a:t>[1.60942484+1.02849974e-04j 1.60116589+9.83178135e-05j</a:t>
+            </a:r>
+          </a:p>
+          <a:p>
+            <a:r>
+              <a:rPr lang="es-ES" sz="1200" dirty="0"/>
+              <a:t> 1.53540293+1.77367472e-04j 1.52057329+1.77190584e-04j</a:t>
+            </a:r>
+          </a:p>
+          <a:p>
+            <a:r>
+              <a:rPr lang="es-ES" sz="1200" dirty="0"/>
+              <a:t> 1.45637592+1.78980401e-04j 1.44042642+2.10123701e-04j]</a:t>
+            </a:r>
+          </a:p>
+          <a:p>
+            <a:r>
+              <a:rPr lang="es-ES" sz="1200" dirty="0"/>
+              <a:t>Si nos fijamos en la parte real, podemos observar que se propagan los 5 primeros modos menos el último, ya que este ve un índice efectivo menor al del </a:t>
+            </a:r>
+            <a:r>
+              <a:rPr lang="es-ES" sz="1200" dirty="0" err="1"/>
+              <a:t>cladding</a:t>
+            </a:r>
+            <a:r>
+              <a:rPr lang="es-ES" sz="1200" dirty="0"/>
+              <a:t> (1.44).</a:t>
+            </a:r>
+          </a:p>
+          <a:p>
+            <a:endParaRPr lang="es-ES" sz="1200" dirty="0"/>
+          </a:p>
+          <a:p>
+            <a:r>
+              <a:rPr lang="es-ES" sz="1200" dirty="0"/>
+              <a:t>Análisis del porcentaje de TE de cada modo:</a:t>
+            </a:r>
+          </a:p>
+          <a:p>
+            <a:r>
+              <a:rPr lang="en-US" sz="1200" dirty="0"/>
+              <a:t>array([0.994898  , 0.99527537, 0.00888064, 0.01130183, 0.97648502, 0.35301659])</a:t>
+            </a:r>
+          </a:p>
+          <a:p>
+            <a:r>
+              <a:rPr lang="es-ES" sz="1200" dirty="0"/>
+              <a:t>Podemos observar que los modos que serán más TE son el 1,2 y 5, mientras que los otros tres tendrán mayor componente TM</a:t>
+            </a:r>
+          </a:p>
+        </p:txBody>
+      </p:sp>
+      <p:sp>
+        <p:nvSpPr>
+          <p:cNvPr id="4" name="Marcador de pie de página 3">
+            <a:extLst>
+              <a:ext uri="{FF2B5EF4-FFF2-40B4-BE49-F238E27FC236}">
+                <a16:creationId xmlns:a16="http://schemas.microsoft.com/office/drawing/2014/main" id="{E0CD65A1-9D4A-4D1C-AFBB-431764CDB3F0}"/>
+              </a:ext>
+            </a:extLst>
+          </p:cNvPr>
+          <p:cNvSpPr>
+            <a:spLocks noGrp="1"/>
+          </p:cNvSpPr>
+          <p:nvPr>
+            <p:ph type="ftr" sz="quarter" idx="5"/>
+          </p:nvPr>
+        </p:nvSpPr>
+        <p:spPr/>
+        <p:txBody>
+          <a:bodyPr/>
+          <a:lstStyle/>
+          <a:p>
+            <a:pPr marL="12700">
+              <a:spcBef>
+                <a:spcPts val="15"/>
+              </a:spcBef>
+            </a:pPr>
+            <a:r>
+              <a:rPr lang="es-ES" spc="-5" dirty="0"/>
+              <a:t>LAB 0.2. COUPLERS</a:t>
+            </a:r>
+          </a:p>
+        </p:txBody>
+      </p:sp>
+      <p:sp>
+        <p:nvSpPr>
+          <p:cNvPr id="5" name="Marcador de número de diapositiva 4">
+            <a:extLst>
+              <a:ext uri="{FF2B5EF4-FFF2-40B4-BE49-F238E27FC236}">
+                <a16:creationId xmlns:a16="http://schemas.microsoft.com/office/drawing/2014/main" id="{8FE1C107-890A-49C8-B1C9-17571AEBDB76}"/>
+              </a:ext>
+            </a:extLst>
+          </p:cNvPr>
+          <p:cNvSpPr>
+            <a:spLocks noGrp="1"/>
+          </p:cNvSpPr>
+          <p:nvPr>
+            <p:ph type="sldNum" sz="quarter" idx="7"/>
+          </p:nvPr>
+        </p:nvSpPr>
+        <p:spPr/>
+        <p:txBody>
+          <a:bodyPr/>
+          <a:lstStyle/>
+          <a:p>
+            <a:fld id="{B6F15528-21DE-4FAA-801E-634DDDAF4B2B}" type="slidenum">
+              <a:rPr lang="es-ES" smtClean="0"/>
+              <a:t>4</a:t>
+            </a:fld>
+            <a:endParaRPr lang="es-ES"/>
+          </a:p>
+        </p:txBody>
+      </p:sp>
+      <p:sp>
+        <p:nvSpPr>
+          <p:cNvPr id="19" name="object 16">
+            <a:extLst>
+              <a:ext uri="{FF2B5EF4-FFF2-40B4-BE49-F238E27FC236}">
+                <a16:creationId xmlns:a16="http://schemas.microsoft.com/office/drawing/2014/main" id="{8AFCDEA1-211D-4C75-AC9E-88A4F8E1B393}"/>
+              </a:ext>
+            </a:extLst>
+          </p:cNvPr>
+          <p:cNvSpPr txBox="1">
+            <a:spLocks noGrp="1"/>
+          </p:cNvSpPr>
+          <p:nvPr>
+            <p:ph type="title"/>
+          </p:nvPr>
+        </p:nvSpPr>
+        <p:spPr>
+          <a:xfrm>
+            <a:off x="590550" y="206375"/>
+            <a:ext cx="10991850" cy="307975"/>
+          </a:xfrm>
+          <a:prstGeom prst="rect">
+            <a:avLst/>
+          </a:prstGeom>
+        </p:spPr>
+        <p:txBody>
+          <a:bodyPr vert="horz" wrap="square" lIns="0" tIns="12700" rIns="0" bIns="0" rtlCol="0">
+            <a:spAutoFit/>
+          </a:bodyPr>
+          <a:lstStyle/>
+          <a:p>
+            <a:pPr marL="12700">
+              <a:lnSpc>
+                <a:spcPct val="100000"/>
+              </a:lnSpc>
+              <a:spcBef>
+                <a:spcPts val="100"/>
+              </a:spcBef>
+            </a:pPr>
+            <a:r>
+              <a:rPr lang="en-US" sz="2500" dirty="0"/>
+              <a:t>Learning outcome #1 – Directional coupler cross-section in </a:t>
+            </a:r>
+            <a:r>
+              <a:rPr lang="en-US" sz="2500" dirty="0" err="1"/>
+              <a:t>GDSFactory</a:t>
+            </a:r>
+            <a:br>
+              <a:rPr lang="es-ES" sz="2500" spc="-5" dirty="0">
+                <a:latin typeface="+mj-lt"/>
+                <a:cs typeface="Lucida Sans"/>
+              </a:rPr>
+            </a:br>
+            <a:endParaRPr sz="2500" b="0" dirty="0">
+              <a:latin typeface="+mj-lt"/>
+              <a:cs typeface="Lucida Sans"/>
+            </a:endParaRPr>
+          </a:p>
+        </p:txBody>
+      </p:sp>
+    </p:spTree>
+    <p:extLst>
+      <p:ext uri="{BB962C8B-B14F-4D97-AF65-F5344CB8AC3E}">
+        <p14:creationId xmlns:p14="http://schemas.microsoft.com/office/powerpoint/2010/main" val="2576272379"/>
+      </p:ext>
+    </p:extLst>
+  </p:cSld>
+  <p:clrMapOvr>
+    <a:masterClrMapping/>
+  </p:clrMapOvr>
+</p:sld>
+</file>
+
+<file path=ppt/slides/slide5.xml><?xml version="1.0" encoding="utf-8"?>
+<p:sld xmlns:a="http://schemas.openxmlformats.org/drawingml/2006/main" xmlns:r="http://schemas.openxmlformats.org/officeDocument/2006/relationships" xmlns:p="http://schemas.openxmlformats.org/presentationml/2006/main">
+  <p:cSld>
+    <p:spTree>
+      <p:nvGrpSpPr>
+        <p:cNvPr id="1" name=""/>
+        <p:cNvGrpSpPr/>
+        <p:nvPr/>
+      </p:nvGrpSpPr>
+      <p:grpSpPr>
+        <a:xfrm>
+          <a:off x="0" y="0"/>
+          <a:ext cx="0" cy="0"/>
+          <a:chOff x="0" y="0"/>
+          <a:chExt cx="0" cy="0"/>
+        </a:xfrm>
+      </p:grpSpPr>
+      <p:sp>
+        <p:nvSpPr>
+          <p:cNvPr id="4" name="Marcador de pie de página 3">
+            <a:extLst>
+              <a:ext uri="{FF2B5EF4-FFF2-40B4-BE49-F238E27FC236}">
+                <a16:creationId xmlns:a16="http://schemas.microsoft.com/office/drawing/2014/main" id="{E0CD65A1-9D4A-4D1C-AFBB-431764CDB3F0}"/>
+              </a:ext>
+            </a:extLst>
+          </p:cNvPr>
+          <p:cNvSpPr>
+            <a:spLocks noGrp="1"/>
+          </p:cNvSpPr>
+          <p:nvPr>
+            <p:ph type="ftr" sz="quarter" idx="5"/>
+          </p:nvPr>
+        </p:nvSpPr>
+        <p:spPr/>
+        <p:txBody>
+          <a:bodyPr/>
+          <a:lstStyle/>
+          <a:p>
+            <a:pPr marL="12700">
+              <a:spcBef>
+                <a:spcPts val="15"/>
+              </a:spcBef>
+            </a:pPr>
+            <a:r>
+              <a:rPr lang="es-ES" spc="-5"/>
+              <a:t>LAB 0.2. COUPLERS</a:t>
+            </a:r>
+            <a:endParaRPr lang="es-ES" spc="-5" dirty="0"/>
+          </a:p>
+        </p:txBody>
+      </p:sp>
+      <p:sp>
+        <p:nvSpPr>
+          <p:cNvPr id="5" name="Marcador de número de diapositiva 4">
+            <a:extLst>
+              <a:ext uri="{FF2B5EF4-FFF2-40B4-BE49-F238E27FC236}">
+                <a16:creationId xmlns:a16="http://schemas.microsoft.com/office/drawing/2014/main" id="{8FE1C107-890A-49C8-B1C9-17571AEBDB76}"/>
+              </a:ext>
+            </a:extLst>
+          </p:cNvPr>
+          <p:cNvSpPr>
+            <a:spLocks noGrp="1"/>
+          </p:cNvSpPr>
+          <p:nvPr>
+            <p:ph type="sldNum" sz="quarter" idx="7"/>
+          </p:nvPr>
+        </p:nvSpPr>
+        <p:spPr/>
+        <p:txBody>
+          <a:bodyPr/>
+          <a:lstStyle/>
+          <a:p>
+            <a:fld id="{B6F15528-21DE-4FAA-801E-634DDDAF4B2B}" type="slidenum">
+              <a:rPr lang="es-ES" smtClean="0"/>
+              <a:t>5</a:t>
+            </a:fld>
+            <a:endParaRPr lang="es-ES"/>
+          </a:p>
+        </p:txBody>
+      </p:sp>
+      <p:sp>
+        <p:nvSpPr>
+          <p:cNvPr id="19" name="object 16">
+            <a:extLst>
+              <a:ext uri="{FF2B5EF4-FFF2-40B4-BE49-F238E27FC236}">
+                <a16:creationId xmlns:a16="http://schemas.microsoft.com/office/drawing/2014/main" id="{8AFCDEA1-211D-4C75-AC9E-88A4F8E1B393}"/>
+              </a:ext>
+            </a:extLst>
+          </p:cNvPr>
+          <p:cNvSpPr txBox="1">
+            <a:spLocks noGrp="1"/>
+          </p:cNvSpPr>
+          <p:nvPr>
+            <p:ph type="title"/>
+          </p:nvPr>
+        </p:nvSpPr>
+        <p:spPr>
+          <a:xfrm>
+            <a:off x="590550" y="206375"/>
+            <a:ext cx="10991850" cy="307975"/>
+          </a:xfrm>
+          <a:prstGeom prst="rect">
+            <a:avLst/>
+          </a:prstGeom>
+        </p:spPr>
+        <p:txBody>
+          <a:bodyPr vert="horz" wrap="square" lIns="0" tIns="12700" rIns="0" bIns="0" rtlCol="0">
+            <a:spAutoFit/>
+          </a:bodyPr>
+          <a:lstStyle/>
+          <a:p>
+            <a:pPr marL="12700">
+              <a:lnSpc>
+                <a:spcPct val="100000"/>
+              </a:lnSpc>
+              <a:spcBef>
+                <a:spcPts val="100"/>
+              </a:spcBef>
+            </a:pPr>
+            <a:r>
+              <a:rPr lang="en-US" sz="2500" dirty="0"/>
+              <a:t>Learning outcome #1 – Directional coupler cross-section in </a:t>
+            </a:r>
+            <a:r>
+              <a:rPr lang="en-US" sz="2500" dirty="0" err="1"/>
+              <a:t>GDSFactory</a:t>
+            </a:r>
+            <a:br>
+              <a:rPr lang="es-ES" sz="2500" spc="-5" dirty="0">
+                <a:latin typeface="+mj-lt"/>
+                <a:cs typeface="Lucida Sans"/>
+              </a:rPr>
+            </a:br>
+            <a:endParaRPr sz="2500" b="0" dirty="0">
+              <a:latin typeface="+mj-lt"/>
+              <a:cs typeface="Lucida Sans"/>
+            </a:endParaRPr>
+          </a:p>
+        </p:txBody>
+      </p:sp>
+      <p:pic>
+        <p:nvPicPr>
+          <p:cNvPr id="20" name="Imagen 19">
+            <a:extLst>
+              <a:ext uri="{FF2B5EF4-FFF2-40B4-BE49-F238E27FC236}">
+                <a16:creationId xmlns:a16="http://schemas.microsoft.com/office/drawing/2014/main" id="{DD61F9A8-8DE6-4E15-99D3-7C3785E6868A}"/>
+              </a:ext>
+            </a:extLst>
+          </p:cNvPr>
+          <p:cNvPicPr>
+            <a:picLocks noChangeAspect="1"/>
+          </p:cNvPicPr>
+          <p:nvPr/>
+        </p:nvPicPr>
+        <p:blipFill>
+          <a:blip r:embed="rId2"/>
+          <a:stretch>
+            <a:fillRect/>
+          </a:stretch>
+        </p:blipFill>
+        <p:spPr>
+          <a:xfrm>
+            <a:off x="814375" y="2513718"/>
+            <a:ext cx="2446794" cy="1672764"/>
+          </a:xfrm>
+          <a:prstGeom prst="rect">
+            <a:avLst/>
+          </a:prstGeom>
+        </p:spPr>
+      </p:pic>
+      <p:sp>
+        <p:nvSpPr>
+          <p:cNvPr id="21" name="CuadroTexto 20">
+            <a:extLst>
+              <a:ext uri="{FF2B5EF4-FFF2-40B4-BE49-F238E27FC236}">
+                <a16:creationId xmlns:a16="http://schemas.microsoft.com/office/drawing/2014/main" id="{A180171A-F02F-45C9-BAE2-9B9BAA96ED8E}"/>
+              </a:ext>
+            </a:extLst>
+          </p:cNvPr>
+          <p:cNvSpPr txBox="1"/>
+          <p:nvPr/>
+        </p:nvSpPr>
+        <p:spPr>
+          <a:xfrm>
+            <a:off x="457200" y="1820851"/>
+            <a:ext cx="3566583" cy="461665"/>
+          </a:xfrm>
+          <a:prstGeom prst="rect">
+            <a:avLst/>
+          </a:prstGeom>
+          <a:noFill/>
+        </p:spPr>
+        <p:txBody>
+          <a:bodyPr wrap="square">
+            <a:spAutoFit/>
+          </a:bodyPr>
+          <a:lstStyle/>
+          <a:p>
+            <a:r>
+              <a:rPr lang="es-ES" sz="1200" dirty="0"/>
+              <a:t>Sección transversal del primer modo, correspondiente </a:t>
+            </a:r>
+          </a:p>
+          <a:p>
+            <a:r>
+              <a:rPr lang="es-ES" sz="1200" dirty="0"/>
+              <a:t>al </a:t>
+            </a:r>
+            <a:r>
+              <a:rPr lang="es-ES" sz="1200" dirty="0" err="1"/>
+              <a:t>supermodo</a:t>
+            </a:r>
+            <a:r>
+              <a:rPr lang="es-ES" sz="1200" dirty="0"/>
+              <a:t> par (simétrico):</a:t>
+            </a:r>
+          </a:p>
+        </p:txBody>
+      </p:sp>
+      <p:sp>
+        <p:nvSpPr>
+          <p:cNvPr id="22" name="CuadroTexto 21">
+            <a:extLst>
+              <a:ext uri="{FF2B5EF4-FFF2-40B4-BE49-F238E27FC236}">
+                <a16:creationId xmlns:a16="http://schemas.microsoft.com/office/drawing/2014/main" id="{7FE54070-91AB-4845-9A14-1C9758B25FE9}"/>
+              </a:ext>
+            </a:extLst>
+          </p:cNvPr>
+          <p:cNvSpPr txBox="1"/>
+          <p:nvPr/>
+        </p:nvSpPr>
+        <p:spPr>
+          <a:xfrm>
+            <a:off x="4419600" y="1805421"/>
+            <a:ext cx="3810000" cy="646331"/>
+          </a:xfrm>
+          <a:prstGeom prst="rect">
+            <a:avLst/>
+          </a:prstGeom>
+          <a:noFill/>
+        </p:spPr>
+        <p:txBody>
+          <a:bodyPr wrap="square">
+            <a:spAutoFit/>
+          </a:bodyPr>
+          <a:lstStyle/>
+          <a:p>
+            <a:r>
+              <a:rPr lang="es-ES" sz="1200" dirty="0"/>
+              <a:t>Sección transversal del segundo modo, correspondiente </a:t>
+            </a:r>
+          </a:p>
+          <a:p>
+            <a:r>
+              <a:rPr lang="es-ES" sz="1200" dirty="0"/>
+              <a:t>al </a:t>
+            </a:r>
+            <a:r>
+              <a:rPr lang="es-ES" sz="1200" dirty="0" err="1"/>
+              <a:t>supermodo</a:t>
+            </a:r>
+            <a:r>
+              <a:rPr lang="es-ES" sz="1200" dirty="0"/>
+              <a:t> impar (antisimétrico), donde el campo eléctrico oscila en contrafase:</a:t>
+            </a:r>
+          </a:p>
+        </p:txBody>
+      </p:sp>
+      <p:pic>
+        <p:nvPicPr>
+          <p:cNvPr id="23" name="Imagen 22">
+            <a:extLst>
+              <a:ext uri="{FF2B5EF4-FFF2-40B4-BE49-F238E27FC236}">
+                <a16:creationId xmlns:a16="http://schemas.microsoft.com/office/drawing/2014/main" id="{7175DEC3-BAB8-459C-A918-FF0F2F3306A4}"/>
+              </a:ext>
+            </a:extLst>
+          </p:cNvPr>
+          <p:cNvPicPr>
+            <a:picLocks noChangeAspect="1"/>
+          </p:cNvPicPr>
+          <p:nvPr/>
+        </p:nvPicPr>
+        <p:blipFill>
+          <a:blip r:embed="rId3"/>
+          <a:stretch>
+            <a:fillRect/>
+          </a:stretch>
+        </p:blipFill>
+        <p:spPr>
+          <a:xfrm>
+            <a:off x="4800600" y="2537285"/>
+            <a:ext cx="2766144" cy="1852031"/>
+          </a:xfrm>
+          <a:prstGeom prst="rect">
+            <a:avLst/>
+          </a:prstGeom>
+        </p:spPr>
+      </p:pic>
+      <p:pic>
+        <p:nvPicPr>
+          <p:cNvPr id="24" name="Imagen 23">
+            <a:extLst>
+              <a:ext uri="{FF2B5EF4-FFF2-40B4-BE49-F238E27FC236}">
+                <a16:creationId xmlns:a16="http://schemas.microsoft.com/office/drawing/2014/main" id="{95AA9E3F-FF5B-4AA4-9AB8-B35AB95052FC}"/>
+              </a:ext>
+            </a:extLst>
+          </p:cNvPr>
+          <p:cNvPicPr>
+            <a:picLocks noChangeAspect="1"/>
+          </p:cNvPicPr>
+          <p:nvPr/>
+        </p:nvPicPr>
+        <p:blipFill>
+          <a:blip r:embed="rId4"/>
+          <a:stretch>
+            <a:fillRect/>
+          </a:stretch>
+        </p:blipFill>
+        <p:spPr>
+          <a:xfrm>
+            <a:off x="8580169" y="2384573"/>
+            <a:ext cx="3108861" cy="2077915"/>
+          </a:xfrm>
+          <a:prstGeom prst="rect">
+            <a:avLst/>
+          </a:prstGeom>
+        </p:spPr>
+      </p:pic>
+      <p:sp>
+        <p:nvSpPr>
+          <p:cNvPr id="25" name="CuadroTexto 24">
+            <a:extLst>
+              <a:ext uri="{FF2B5EF4-FFF2-40B4-BE49-F238E27FC236}">
+                <a16:creationId xmlns:a16="http://schemas.microsoft.com/office/drawing/2014/main" id="{3D565E00-F368-4503-B3C8-4754391FF88F}"/>
+              </a:ext>
+            </a:extLst>
+          </p:cNvPr>
+          <p:cNvSpPr txBox="1"/>
+          <p:nvPr/>
+        </p:nvSpPr>
+        <p:spPr>
+          <a:xfrm>
+            <a:off x="8229600" y="1738108"/>
+            <a:ext cx="3810000" cy="461665"/>
+          </a:xfrm>
+          <a:prstGeom prst="rect">
+            <a:avLst/>
+          </a:prstGeom>
+          <a:noFill/>
+        </p:spPr>
+        <p:txBody>
+          <a:bodyPr wrap="square">
+            <a:spAutoFit/>
+          </a:bodyPr>
+          <a:lstStyle/>
+          <a:p>
+            <a:r>
+              <a:rPr lang="es-ES" sz="1200" dirty="0"/>
+              <a:t>Sección transversal del tercer modo. Podemos observar que tiene </a:t>
+            </a:r>
+            <a:r>
+              <a:rPr lang="es-ES" sz="1200" dirty="0" err="1"/>
+              <a:t>comoponente</a:t>
+            </a:r>
+            <a:r>
+              <a:rPr lang="es-ES" sz="1200" dirty="0"/>
+              <a:t> en el modo TM.</a:t>
+            </a:r>
+          </a:p>
+        </p:txBody>
+      </p:sp>
+      <p:pic>
+        <p:nvPicPr>
+          <p:cNvPr id="26" name="Imagen 25">
+            <a:extLst>
+              <a:ext uri="{FF2B5EF4-FFF2-40B4-BE49-F238E27FC236}">
+                <a16:creationId xmlns:a16="http://schemas.microsoft.com/office/drawing/2014/main" id="{811EB3F4-7E8D-4382-BF5B-331FEE8A5402}"/>
+              </a:ext>
+            </a:extLst>
+          </p:cNvPr>
+          <p:cNvPicPr>
+            <a:picLocks noChangeAspect="1"/>
+          </p:cNvPicPr>
+          <p:nvPr/>
+        </p:nvPicPr>
+        <p:blipFill>
+          <a:blip r:embed="rId5"/>
+          <a:stretch>
+            <a:fillRect/>
+          </a:stretch>
+        </p:blipFill>
+        <p:spPr>
+          <a:xfrm>
+            <a:off x="814375" y="4495800"/>
+            <a:ext cx="2562249" cy="1746988"/>
+          </a:xfrm>
+          <a:prstGeom prst="rect">
+            <a:avLst/>
+          </a:prstGeom>
+        </p:spPr>
+      </p:pic>
+      <p:sp>
+        <p:nvSpPr>
+          <p:cNvPr id="28" name="CuadroTexto 27">
+            <a:extLst>
+              <a:ext uri="{FF2B5EF4-FFF2-40B4-BE49-F238E27FC236}">
+                <a16:creationId xmlns:a16="http://schemas.microsoft.com/office/drawing/2014/main" id="{B92B350C-C75E-436C-AE0E-BFE2A5580519}"/>
+              </a:ext>
+            </a:extLst>
+          </p:cNvPr>
+          <p:cNvSpPr txBox="1"/>
+          <p:nvPr/>
+        </p:nvSpPr>
+        <p:spPr>
+          <a:xfrm>
+            <a:off x="457200" y="1053093"/>
+            <a:ext cx="10991850" cy="276999"/>
+          </a:xfrm>
+          <a:prstGeom prst="rect">
+            <a:avLst/>
+          </a:prstGeom>
+          <a:noFill/>
+        </p:spPr>
+        <p:txBody>
+          <a:bodyPr wrap="square">
+            <a:spAutoFit/>
+          </a:bodyPr>
+          <a:lstStyle/>
+          <a:p>
+            <a:r>
+              <a:rPr lang="es-ES" sz="1200" dirty="0"/>
+              <a:t>A continuación se va a mostrar la sección transversal de los modos. En la parte de arriba se muestra el análisis del modo TE y en el modo TM. </a:t>
+            </a:r>
+          </a:p>
+        </p:txBody>
+      </p:sp>
+    </p:spTree>
+    <p:extLst>
+      <p:ext uri="{BB962C8B-B14F-4D97-AF65-F5344CB8AC3E}">
+        <p14:creationId xmlns:p14="http://schemas.microsoft.com/office/powerpoint/2010/main" val="2943814146"/>
+      </p:ext>
+    </p:extLst>
+  </p:cSld>
+  <p:clrMapOvr>
+    <a:masterClrMapping/>
+  </p:clrMapOvr>
+</p:sld>
+</file>
+
+<file path=ppt/slides/slide6.xml><?xml version="1.0" encoding="utf-8"?>
+<p:sld xmlns:a="http://schemas.openxmlformats.org/drawingml/2006/main" xmlns:r="http://schemas.openxmlformats.org/officeDocument/2006/relationships" xmlns:p="http://schemas.openxmlformats.org/presentationml/2006/main">
+  <p:cSld>
+    <p:spTree>
+      <p:nvGrpSpPr>
+        <p:cNvPr id="1" name=""/>
+        <p:cNvGrpSpPr/>
+        <p:nvPr/>
+      </p:nvGrpSpPr>
+      <p:grpSpPr>
+        <a:xfrm>
+          <a:off x="0" y="0"/>
+          <a:ext cx="0" cy="0"/>
+          <a:chOff x="0" y="0"/>
+          <a:chExt cx="0" cy="0"/>
+        </a:xfrm>
+      </p:grpSpPr>
+      <p:sp>
+        <p:nvSpPr>
+          <p:cNvPr id="4" name="Marcador de pie de página 3">
+            <a:extLst>
+              <a:ext uri="{FF2B5EF4-FFF2-40B4-BE49-F238E27FC236}">
+                <a16:creationId xmlns:a16="http://schemas.microsoft.com/office/drawing/2014/main" id="{E0CD65A1-9D4A-4D1C-AFBB-431764CDB3F0}"/>
+              </a:ext>
+            </a:extLst>
+          </p:cNvPr>
+          <p:cNvSpPr>
+            <a:spLocks noGrp="1"/>
+          </p:cNvSpPr>
+          <p:nvPr>
+            <p:ph type="ftr" sz="quarter" idx="5"/>
+          </p:nvPr>
+        </p:nvSpPr>
+        <p:spPr/>
+        <p:txBody>
+          <a:bodyPr/>
+          <a:lstStyle/>
+          <a:p>
+            <a:pPr marL="12700">
+              <a:spcBef>
+                <a:spcPts val="15"/>
+              </a:spcBef>
+            </a:pPr>
+            <a:r>
+              <a:rPr lang="es-ES" spc="-5"/>
+              <a:t>LAB 0.2. COUPLERS</a:t>
+            </a:r>
+            <a:endParaRPr lang="es-ES" spc="-5" dirty="0"/>
+          </a:p>
+        </p:txBody>
+      </p:sp>
+      <p:sp>
+        <p:nvSpPr>
+          <p:cNvPr id="5" name="Marcador de número de diapositiva 4">
+            <a:extLst>
+              <a:ext uri="{FF2B5EF4-FFF2-40B4-BE49-F238E27FC236}">
+                <a16:creationId xmlns:a16="http://schemas.microsoft.com/office/drawing/2014/main" id="{8FE1C107-890A-49C8-B1C9-17571AEBDB76}"/>
+              </a:ext>
+            </a:extLst>
+          </p:cNvPr>
+          <p:cNvSpPr>
+            <a:spLocks noGrp="1"/>
+          </p:cNvSpPr>
+          <p:nvPr>
+            <p:ph type="sldNum" sz="quarter" idx="7"/>
+          </p:nvPr>
+        </p:nvSpPr>
+        <p:spPr/>
+        <p:txBody>
+          <a:bodyPr/>
+          <a:lstStyle/>
+          <a:p>
+            <a:fld id="{B6F15528-21DE-4FAA-801E-634DDDAF4B2B}" type="slidenum">
+              <a:rPr lang="es-ES" smtClean="0"/>
+              <a:t>6</a:t>
+            </a:fld>
+            <a:endParaRPr lang="es-ES"/>
+          </a:p>
+        </p:txBody>
+      </p:sp>
+      <p:sp>
+        <p:nvSpPr>
+          <p:cNvPr id="9" name="CuadroTexto 8">
+            <a:extLst>
+              <a:ext uri="{FF2B5EF4-FFF2-40B4-BE49-F238E27FC236}">
+                <a16:creationId xmlns:a16="http://schemas.microsoft.com/office/drawing/2014/main" id="{A4E1AF72-69FD-4F13-A583-23A04ADA921C}"/>
+              </a:ext>
+            </a:extLst>
+          </p:cNvPr>
+          <p:cNvSpPr txBox="1"/>
+          <p:nvPr/>
+        </p:nvSpPr>
+        <p:spPr>
+          <a:xfrm>
+            <a:off x="457200" y="1066800"/>
+            <a:ext cx="3566583" cy="830997"/>
+          </a:xfrm>
+          <a:prstGeom prst="rect">
+            <a:avLst/>
+          </a:prstGeom>
+          <a:noFill/>
+        </p:spPr>
+        <p:txBody>
+          <a:bodyPr wrap="square">
+            <a:spAutoFit/>
+          </a:bodyPr>
+          <a:lstStyle/>
+          <a:p>
+            <a:r>
+              <a:rPr lang="es-ES" sz="1200" dirty="0"/>
+              <a:t>Sección transversal del cuarto modo (TM). Se puede observar que hay algo de confinamiento dentro del núcleo pero hay mucha componente de la luz que viaja por la cubierta.</a:t>
+            </a:r>
+          </a:p>
+        </p:txBody>
+      </p:sp>
+      <p:sp>
+        <p:nvSpPr>
+          <p:cNvPr id="10" name="CuadroTexto 9">
+            <a:extLst>
+              <a:ext uri="{FF2B5EF4-FFF2-40B4-BE49-F238E27FC236}">
+                <a16:creationId xmlns:a16="http://schemas.microsoft.com/office/drawing/2014/main" id="{7AA8074F-CEBA-4A99-A526-1BABDCAAD773}"/>
+              </a:ext>
+            </a:extLst>
+          </p:cNvPr>
+          <p:cNvSpPr txBox="1"/>
+          <p:nvPr/>
+        </p:nvSpPr>
+        <p:spPr>
+          <a:xfrm>
+            <a:off x="4343400" y="1050571"/>
+            <a:ext cx="3810000" cy="276999"/>
+          </a:xfrm>
+          <a:prstGeom prst="rect">
+            <a:avLst/>
+          </a:prstGeom>
+          <a:noFill/>
+        </p:spPr>
+        <p:txBody>
+          <a:bodyPr wrap="square">
+            <a:spAutoFit/>
+          </a:bodyPr>
+          <a:lstStyle/>
+          <a:p>
+            <a:r>
+              <a:rPr lang="es-ES" sz="1200" dirty="0"/>
+              <a:t>Sección transversal del quinto modo:</a:t>
+            </a:r>
+          </a:p>
+        </p:txBody>
+      </p:sp>
+      <p:sp>
+        <p:nvSpPr>
+          <p:cNvPr id="18" name="CuadroTexto 17">
+            <a:extLst>
+              <a:ext uri="{FF2B5EF4-FFF2-40B4-BE49-F238E27FC236}">
+                <a16:creationId xmlns:a16="http://schemas.microsoft.com/office/drawing/2014/main" id="{760E0D21-B3A1-4B49-856F-A20EC0CC9FDA}"/>
+              </a:ext>
+            </a:extLst>
+          </p:cNvPr>
+          <p:cNvSpPr txBox="1"/>
+          <p:nvPr/>
+        </p:nvSpPr>
+        <p:spPr>
+          <a:xfrm>
+            <a:off x="8153400" y="983258"/>
+            <a:ext cx="3810000" cy="646331"/>
+          </a:xfrm>
+          <a:prstGeom prst="rect">
+            <a:avLst/>
+          </a:prstGeom>
+          <a:noFill/>
+        </p:spPr>
+        <p:txBody>
+          <a:bodyPr wrap="square">
+            <a:spAutoFit/>
+          </a:bodyPr>
+          <a:lstStyle/>
+          <a:p>
+            <a:r>
+              <a:rPr lang="es-ES" sz="1200" dirty="0"/>
+              <a:t>Sección transversal del sexto modo. Podemos observar que, en este caso, como se había predicho anteriormente el modo estará en corte y no se propagará por la guía. </a:t>
+            </a:r>
+          </a:p>
+        </p:txBody>
+      </p:sp>
+      <p:sp>
+        <p:nvSpPr>
+          <p:cNvPr id="19" name="object 16">
+            <a:extLst>
+              <a:ext uri="{FF2B5EF4-FFF2-40B4-BE49-F238E27FC236}">
+                <a16:creationId xmlns:a16="http://schemas.microsoft.com/office/drawing/2014/main" id="{8AFCDEA1-211D-4C75-AC9E-88A4F8E1B393}"/>
+              </a:ext>
+            </a:extLst>
+          </p:cNvPr>
+          <p:cNvSpPr txBox="1">
+            <a:spLocks noGrp="1"/>
+          </p:cNvSpPr>
+          <p:nvPr>
+            <p:ph type="title"/>
+          </p:nvPr>
+        </p:nvSpPr>
+        <p:spPr>
+          <a:xfrm>
+            <a:off x="590550" y="206375"/>
+            <a:ext cx="10991850" cy="307975"/>
+          </a:xfrm>
+          <a:prstGeom prst="rect">
+            <a:avLst/>
+          </a:prstGeom>
+        </p:spPr>
+        <p:txBody>
+          <a:bodyPr vert="horz" wrap="square" lIns="0" tIns="12700" rIns="0" bIns="0" rtlCol="0">
+            <a:spAutoFit/>
+          </a:bodyPr>
+          <a:lstStyle/>
+          <a:p>
+            <a:pPr marL="12700">
+              <a:lnSpc>
+                <a:spcPct val="100000"/>
+              </a:lnSpc>
+              <a:spcBef>
+                <a:spcPts val="100"/>
+              </a:spcBef>
+            </a:pPr>
+            <a:r>
+              <a:rPr lang="en-US" sz="2500" dirty="0"/>
+              <a:t>Learning outcome #1 – Directional coupler cross-section in </a:t>
+            </a:r>
+            <a:r>
+              <a:rPr lang="en-US" sz="2500" dirty="0" err="1"/>
+              <a:t>GDSFactory</a:t>
+            </a:r>
+            <a:br>
+              <a:rPr lang="es-ES" sz="2500" spc="-5" dirty="0">
+                <a:latin typeface="+mj-lt"/>
+                <a:cs typeface="Lucida Sans"/>
+              </a:rPr>
+            </a:br>
+            <a:endParaRPr sz="2500" b="0" dirty="0">
+              <a:latin typeface="+mj-lt"/>
+              <a:cs typeface="Lucida Sans"/>
+            </a:endParaRPr>
+          </a:p>
+        </p:txBody>
+      </p:sp>
+      <p:pic>
+        <p:nvPicPr>
+          <p:cNvPr id="6" name="Imagen 5">
+            <a:extLst>
+              <a:ext uri="{FF2B5EF4-FFF2-40B4-BE49-F238E27FC236}">
+                <a16:creationId xmlns:a16="http://schemas.microsoft.com/office/drawing/2014/main" id="{53D5037E-4F8A-49CA-8696-7B930F3AA0EB}"/>
+              </a:ext>
+            </a:extLst>
+          </p:cNvPr>
+          <p:cNvPicPr>
+            <a:picLocks noChangeAspect="1"/>
+          </p:cNvPicPr>
+          <p:nvPr/>
+        </p:nvPicPr>
+        <p:blipFill>
+          <a:blip r:embed="rId2"/>
+          <a:stretch>
+            <a:fillRect/>
+          </a:stretch>
+        </p:blipFill>
+        <p:spPr>
+          <a:xfrm>
+            <a:off x="599017" y="2017905"/>
+            <a:ext cx="2920583" cy="1960460"/>
+          </a:xfrm>
+          <a:prstGeom prst="rect">
+            <a:avLst/>
+          </a:prstGeom>
+        </p:spPr>
+      </p:pic>
+      <p:pic>
+        <p:nvPicPr>
+          <p:cNvPr id="14" name="Imagen 13">
+            <a:extLst>
+              <a:ext uri="{FF2B5EF4-FFF2-40B4-BE49-F238E27FC236}">
+                <a16:creationId xmlns:a16="http://schemas.microsoft.com/office/drawing/2014/main" id="{3D266487-5B72-4CC0-9284-5C2D4C498634}"/>
+              </a:ext>
+            </a:extLst>
+          </p:cNvPr>
+          <p:cNvPicPr>
+            <a:picLocks noChangeAspect="1"/>
+          </p:cNvPicPr>
+          <p:nvPr/>
+        </p:nvPicPr>
+        <p:blipFill>
+          <a:blip r:embed="rId3"/>
+          <a:stretch>
+            <a:fillRect/>
+          </a:stretch>
+        </p:blipFill>
+        <p:spPr>
+          <a:xfrm>
+            <a:off x="4611846" y="2034838"/>
+            <a:ext cx="2928091" cy="1960460"/>
+          </a:xfrm>
+          <a:prstGeom prst="rect">
+            <a:avLst/>
+          </a:prstGeom>
+        </p:spPr>
+      </p:pic>
+      <p:pic>
+        <p:nvPicPr>
+          <p:cNvPr id="17" name="Imagen 16">
+            <a:extLst>
+              <a:ext uri="{FF2B5EF4-FFF2-40B4-BE49-F238E27FC236}">
+                <a16:creationId xmlns:a16="http://schemas.microsoft.com/office/drawing/2014/main" id="{8EA11661-8D45-408C-8C2B-63285CA9D9B3}"/>
+              </a:ext>
+            </a:extLst>
+          </p:cNvPr>
+          <p:cNvPicPr>
+            <a:picLocks noChangeAspect="1"/>
+          </p:cNvPicPr>
+          <p:nvPr/>
+        </p:nvPicPr>
+        <p:blipFill>
+          <a:blip r:embed="rId4"/>
+          <a:stretch>
+            <a:fillRect/>
+          </a:stretch>
+        </p:blipFill>
+        <p:spPr>
+          <a:xfrm>
+            <a:off x="8618900" y="2026371"/>
+            <a:ext cx="2857834" cy="1943527"/>
+          </a:xfrm>
+          <a:prstGeom prst="rect">
+            <a:avLst/>
+          </a:prstGeom>
+        </p:spPr>
+      </p:pic>
+    </p:spTree>
+    <p:extLst>
+      <p:ext uri="{BB962C8B-B14F-4D97-AF65-F5344CB8AC3E}">
+        <p14:creationId xmlns:p14="http://schemas.microsoft.com/office/powerpoint/2010/main" val="1431447358"/>
+      </p:ext>
+    </p:extLst>
+  </p:cSld>
+  <p:clrMapOvr>
+    <a:masterClrMapping/>
+  </p:clrMapOvr>
+</p:sld>
+</file>
+
+<file path=ppt/slides/slide7.xml><?xml version="1.0" encoding="utf-8"?>
 <p:sld xmlns:a="http://schemas.openxmlformats.org/drawingml/2006/main" xmlns:r="http://schemas.openxmlformats.org/officeDocument/2006/relationships" xmlns:p="http://schemas.openxmlformats.org/presentationml/2006/main">
   <p:cSld>
     <p:spTree>
@@ -5277,7 +6692,7 @@
           <a:p>
             <a:fld id="{B6F15528-21DE-4FAA-801E-634DDDAF4B2B}" type="slidenum">
               <a:rPr lang="es-ES" smtClean="0"/>
-              <a:t>4</a:t>
+              <a:t>7</a:t>
             </a:fld>
             <a:endParaRPr lang="es-ES"/>
           </a:p>
@@ -5317,8 +6732,8 @@
           </a:p>
         </p:txBody>
       </p:sp>
-      <mc:AlternateContent xmlns:mc="http://schemas.openxmlformats.org/markup-compatibility/2006">
-        <mc:Choice xmlns:a14="http://schemas.microsoft.com/office/drawing/2010/main" Requires="a14">
+      <mc:AlternateContent xmlns:mc="http://schemas.openxmlformats.org/markup-compatibility/2006" xmlns:a14="http://schemas.microsoft.com/office/drawing/2010/main">
+        <mc:Choice Requires="a14">
           <p:sp>
             <p:nvSpPr>
               <p:cNvPr id="4" name="Marcador de texto 2">
@@ -5552,7 +6967,7 @@
             </p:txBody>
           </p:sp>
         </mc:Choice>
-        <mc:Fallback>
+        <mc:Fallback xmlns="">
           <p:sp>
             <p:nvSpPr>
               <p:cNvPr id="4" name="Marcador de texto 2">
@@ -5640,33 +7055,8 @@
                 <a:latin typeface="Arial" panose="020B0604020202020204" pitchFamily="34" charset="0"/>
                 <a:cs typeface="Arial" panose="020B0604020202020204" pitchFamily="34" charset="0"/>
               </a:rPr>
-              <a:t>Document all your results (neff, plot fields </a:t>
-            </a:r>
-            <a:r>
-              <a:rPr lang="en-US" sz="1200">
-                <a:latin typeface="Arial" panose="020B0604020202020204" pitchFamily="34" charset="0"/>
-                <a:cs typeface="Arial" panose="020B0604020202020204" pitchFamily="34" charset="0"/>
-              </a:rPr>
-              <a:t>of different modes, </a:t>
-            </a:r>
-            <a:r>
-              <a:rPr lang="en-US" sz="1200" dirty="0">
-                <a:latin typeface="Arial" panose="020B0604020202020204" pitchFamily="34" charset="0"/>
-                <a:cs typeface="Arial" panose="020B0604020202020204" pitchFamily="34" charset="0"/>
-              </a:rPr>
-              <a:t>comparison between </a:t>
-            </a:r>
-            <a:r>
-              <a:rPr lang="en-US" sz="1200">
-                <a:latin typeface="Arial" panose="020B0604020202020204" pitchFamily="34" charset="0"/>
-                <a:cs typeface="Arial" panose="020B0604020202020204" pitchFamily="34" charset="0"/>
-              </a:rPr>
-              <a:t>different polarizations…)</a:t>
-            </a:r>
-            <a:endParaRPr lang="en-US" sz="1200" dirty="0">
-              <a:latin typeface="Arial" panose="020B0604020202020204" pitchFamily="34" charset="0"/>
-              <a:cs typeface="Arial" panose="020B0604020202020204" pitchFamily="34" charset="0"/>
-            </a:endParaRPr>
+              <a:t>Document all your results (neff, plot fields of different modes, comparison between different polarizations…)</a:t>
+            </a:r>
           </a:p>
           <a:p>
             <a:pPr algn="just"/>
@@ -5718,7 +7108,7 @@
 </p:sld>
 </file>
 
-<file path=ppt/slides/slide5.xml><?xml version="1.0" encoding="utf-8"?>
+<file path=ppt/slides/slide8.xml><?xml version="1.0" encoding="utf-8"?>
 <p:sld xmlns:a="http://schemas.openxmlformats.org/drawingml/2006/main" xmlns:r="http://schemas.openxmlformats.org/officeDocument/2006/relationships" xmlns:p="http://schemas.openxmlformats.org/presentationml/2006/main">
   <p:cSld>
     <p:spTree>
@@ -5857,13 +7247,178 @@
           <a:p>
             <a:fld id="{B6F15528-21DE-4FAA-801E-634DDDAF4B2B}" type="slidenum">
               <a:rPr lang="es-ES" smtClean="0"/>
-              <a:t>5</a:t>
+              <a:t>8</a:t>
             </a:fld>
             <a:endParaRPr lang="es-ES"/>
           </a:p>
         </p:txBody>
       </p:sp>
     </p:spTree>
+  </p:cSld>
+  <p:clrMapOvr>
+    <a:masterClrMapping/>
+  </p:clrMapOvr>
+</p:sld>
+</file>
+
+<file path=ppt/slides/slide9.xml><?xml version="1.0" encoding="utf-8"?>
+<p:sld xmlns:a="http://schemas.openxmlformats.org/drawingml/2006/main" xmlns:r="http://schemas.openxmlformats.org/officeDocument/2006/relationships" xmlns:p="http://schemas.openxmlformats.org/presentationml/2006/main">
+  <p:cSld>
+    <p:spTree>
+      <p:nvGrpSpPr>
+        <p:cNvPr id="1" name=""/>
+        <p:cNvGrpSpPr/>
+        <p:nvPr/>
+      </p:nvGrpSpPr>
+      <p:grpSpPr>
+        <a:xfrm>
+          <a:off x="0" y="0"/>
+          <a:ext cx="0" cy="0"/>
+          <a:chOff x="0" y="0"/>
+          <a:chExt cx="0" cy="0"/>
+        </a:xfrm>
+      </p:grpSpPr>
+      <p:sp>
+        <p:nvSpPr>
+          <p:cNvPr id="2" name="Título 1">
+            <a:extLst>
+              <a:ext uri="{FF2B5EF4-FFF2-40B4-BE49-F238E27FC236}">
+                <a16:creationId xmlns:a16="http://schemas.microsoft.com/office/drawing/2014/main" id="{E7142EF5-74F6-4935-9D72-DB4F48743FFA}"/>
+              </a:ext>
+            </a:extLst>
+          </p:cNvPr>
+          <p:cNvSpPr>
+            <a:spLocks noGrp="1"/>
+          </p:cNvSpPr>
+          <p:nvPr>
+            <p:ph type="title"/>
+          </p:nvPr>
+        </p:nvSpPr>
+        <p:spPr/>
+        <p:txBody>
+          <a:bodyPr/>
+          <a:lstStyle/>
+          <a:p>
+            <a:endParaRPr lang="es-ES"/>
+          </a:p>
+        </p:txBody>
+      </p:sp>
+      <p:sp>
+        <p:nvSpPr>
+          <p:cNvPr id="3" name="Marcador de texto 2">
+            <a:extLst>
+              <a:ext uri="{FF2B5EF4-FFF2-40B4-BE49-F238E27FC236}">
+                <a16:creationId xmlns:a16="http://schemas.microsoft.com/office/drawing/2014/main" id="{92710A37-98E0-4CCF-8EF0-9D8D84970DD9}"/>
+              </a:ext>
+            </a:extLst>
+          </p:cNvPr>
+          <p:cNvSpPr>
+            <a:spLocks noGrp="1"/>
+          </p:cNvSpPr>
+          <p:nvPr>
+            <p:ph type="body" idx="1"/>
+          </p:nvPr>
+        </p:nvSpPr>
+        <p:spPr>
+          <a:xfrm>
+            <a:off x="609600" y="2152910"/>
+            <a:ext cx="10972800" cy="553998"/>
+          </a:xfrm>
+        </p:spPr>
+        <p:txBody>
+          <a:bodyPr/>
+          <a:lstStyle/>
+          <a:p>
+            <a:r>
+              <a:rPr lang="es-ES" sz="1200" dirty="0"/>
+              <a:t>De pendiendo de la distancia  a la que se corta la longitud del MMI se va a tener una autoimagen determinada</a:t>
+            </a:r>
+          </a:p>
+          <a:p>
+            <a:endParaRPr lang="es-ES" sz="1200" dirty="0"/>
+          </a:p>
+          <a:p>
+            <a:r>
+              <a:rPr lang="es-ES" sz="1200" dirty="0"/>
+              <a:t>Calcular …, …, </a:t>
+            </a:r>
+            <a:r>
+              <a:rPr lang="es-ES" sz="1200" dirty="0" err="1"/>
+              <a:t>L_pi</a:t>
+            </a:r>
+            <a:endParaRPr lang="es-ES" sz="1200" dirty="0"/>
+          </a:p>
+        </p:txBody>
+      </p:sp>
+      <p:sp>
+        <p:nvSpPr>
+          <p:cNvPr id="4" name="Marcador de pie de página 3">
+            <a:extLst>
+              <a:ext uri="{FF2B5EF4-FFF2-40B4-BE49-F238E27FC236}">
+                <a16:creationId xmlns:a16="http://schemas.microsoft.com/office/drawing/2014/main" id="{04DDB22E-DB66-41AA-A98E-87234657D449}"/>
+              </a:ext>
+            </a:extLst>
+          </p:cNvPr>
+          <p:cNvSpPr>
+            <a:spLocks noGrp="1"/>
+          </p:cNvSpPr>
+          <p:nvPr>
+            <p:ph type="ftr" sz="quarter" idx="5"/>
+          </p:nvPr>
+        </p:nvSpPr>
+        <p:spPr/>
+        <p:txBody>
+          <a:bodyPr/>
+          <a:lstStyle/>
+          <a:p>
+            <a:pPr marL="12700">
+              <a:spcBef>
+                <a:spcPts val="15"/>
+              </a:spcBef>
+            </a:pPr>
+            <a:r>
+              <a:rPr lang="es-ES" spc="-5"/>
+              <a:t>LAB 0.2. COUPLERS</a:t>
+            </a:r>
+            <a:endParaRPr lang="es-ES" spc="-5" dirty="0"/>
+          </a:p>
+        </p:txBody>
+      </p:sp>
+      <p:sp>
+        <p:nvSpPr>
+          <p:cNvPr id="5" name="Marcador de número de diapositiva 4">
+            <a:extLst>
+              <a:ext uri="{FF2B5EF4-FFF2-40B4-BE49-F238E27FC236}">
+                <a16:creationId xmlns:a16="http://schemas.microsoft.com/office/drawing/2014/main" id="{953D5AE1-CE5A-4543-9BE3-C8AA193522C0}"/>
+              </a:ext>
+            </a:extLst>
+          </p:cNvPr>
+          <p:cNvSpPr>
+            <a:spLocks noGrp="1"/>
+          </p:cNvSpPr>
+          <p:nvPr>
+            <p:ph type="sldNum" sz="quarter" idx="7"/>
+          </p:nvPr>
+        </p:nvSpPr>
+        <p:spPr/>
+        <p:txBody>
+          <a:bodyPr/>
+          <a:lstStyle/>
+          <a:p>
+            <a:fld id="{B6F15528-21DE-4FAA-801E-634DDDAF4B2B}" type="slidenum">
+              <a:rPr lang="es-ES" smtClean="0"/>
+              <a:t>9</a:t>
+            </a:fld>
+            <a:endParaRPr lang="es-ES"/>
+          </a:p>
+        </p:txBody>
+      </p:sp>
+    </p:spTree>
+    <p:extLst>
+      <p:ext uri="{BB962C8B-B14F-4D97-AF65-F5344CB8AC3E}">
+        <p14:creationId xmlns:p14="http://schemas.microsoft.com/office/powerpoint/2010/main" val="580800172"/>
+      </p:ext>
+    </p:extLst>
   </p:cSld>
   <p:clrMapOvr>
     <a:masterClrMapping/>

--- a/LabBook_020.pptx
+++ b/LabBook_020.pptx
@@ -301,7 +301,7 @@
           <a:p>
             <a:fld id="{8438F8DC-35B0-48E6-A86E-42F1F08DD00F}" type="datetimeFigureOut">
               <a:rPr lang="es-ES" smtClean="0"/>
-              <a:t>16/02/2026</a:t>
+              <a:t>02/03/2026</a:t>
             </a:fld>
             <a:endParaRPr lang="es-ES"/>
           </a:p>
@@ -478,7 +478,7 @@
           <a:p>
             <a:fld id="{FACBDC12-F39B-4B97-8F4D-6734F9D366FF}" type="datetimeFigureOut">
               <a:rPr lang="es-ES" smtClean="0"/>
-              <a:t>16/02/2026</a:t>
+              <a:t>02/03/2026</a:t>
             </a:fld>
             <a:endParaRPr lang="es-ES"/>
           </a:p>
@@ -5028,8 +5028,8 @@
           </p:sp>
         </mc:Fallback>
       </mc:AlternateContent>
-      <mc:AlternateContent xmlns:mc="http://schemas.openxmlformats.org/markup-compatibility/2006">
-        <mc:Choice xmlns:a14="http://schemas.microsoft.com/office/drawing/2010/main" Requires="a14">
+      <mc:AlternateContent xmlns:mc="http://schemas.openxmlformats.org/markup-compatibility/2006" xmlns:a14="http://schemas.microsoft.com/office/drawing/2010/main">
+        <mc:Choice Requires="a14">
           <p:sp>
             <p:nvSpPr>
               <p:cNvPr id="2" name="CuadroTexto 1">
@@ -5462,7 +5462,7 @@
             </p:txBody>
           </p:sp>
         </mc:Choice>
-        <mc:Fallback>
+        <mc:Fallback xmlns="">
           <p:sp>
             <p:nvSpPr>
               <p:cNvPr id="2" name="CuadroTexto 1">

--- a/LabBook_020.pptx
+++ b/LabBook_020.pptx
@@ -5,10 +5,10 @@
     <p:sldMasterId id="2147483648" r:id="rId1"/>
   </p:sldMasterIdLst>
   <p:notesMasterIdLst>
-    <p:notesMasterId r:id="rId11"/>
+    <p:notesMasterId r:id="rId13"/>
   </p:notesMasterIdLst>
   <p:handoutMasterIdLst>
-    <p:handoutMasterId r:id="rId12"/>
+    <p:handoutMasterId r:id="rId14"/>
   </p:handoutMasterIdLst>
   <p:sldIdLst>
     <p:sldId id="256" r:id="rId2"/>
@@ -18,8 +18,10 @@
     <p:sldId id="296" r:id="rId6"/>
     <p:sldId id="297" r:id="rId7"/>
     <p:sldId id="293" r:id="rId8"/>
-    <p:sldId id="288" r:id="rId9"/>
-    <p:sldId id="294" r:id="rId10"/>
+    <p:sldId id="298" r:id="rId9"/>
+    <p:sldId id="299" r:id="rId10"/>
+    <p:sldId id="288" r:id="rId11"/>
+    <p:sldId id="294" r:id="rId12"/>
   </p:sldIdLst>
   <p:sldSz cx="12192000" cy="6858000"/>
   <p:notesSz cx="12192000" cy="6858000"/>
@@ -2447,14 +2449,28 @@
                 <a:latin typeface="Arial"/>
                 <a:cs typeface="Arial"/>
               </a:rPr>
-              <a:t>Student</a:t>
+              <a:t>Student:Sergi</a:t>
             </a:r>
             <a:r>
               <a:rPr lang="es-ES" spc="165" dirty="0">
                 <a:latin typeface="Arial"/>
                 <a:cs typeface="Arial"/>
               </a:rPr>
-              <a:t>: </a:t>
+              <a:t> </a:t>
+            </a:r>
+            <a:r>
+              <a:rPr lang="es-ES" spc="165" dirty="0" err="1">
+                <a:latin typeface="Arial"/>
+                <a:cs typeface="Arial"/>
+              </a:rPr>
+              <a:t>Nàcher</a:t>
+            </a:r>
+            <a:r>
+              <a:rPr lang="es-ES" spc="165" dirty="0">
+                <a:latin typeface="Arial"/>
+                <a:cs typeface="Arial"/>
+              </a:rPr>
+              <a:t> Muñoz </a:t>
             </a:r>
             <a:endParaRPr sz="1800" dirty="0">
               <a:latin typeface="Arial"/>
@@ -2522,6 +2538,324 @@
         </p:txBody>
       </p:sp>
     </p:spTree>
+  </p:cSld>
+  <p:clrMapOvr>
+    <a:masterClrMapping/>
+  </p:clrMapOvr>
+</p:sld>
+</file>
+
+<file path=ppt/slides/slide10.xml><?xml version="1.0" encoding="utf-8"?>
+<p:sld xmlns:a="http://schemas.openxmlformats.org/drawingml/2006/main" xmlns:r="http://schemas.openxmlformats.org/officeDocument/2006/relationships" xmlns:p="http://schemas.openxmlformats.org/presentationml/2006/main">
+  <p:cSld>
+    <p:spTree>
+      <p:nvGrpSpPr>
+        <p:cNvPr id="1" name=""/>
+        <p:cNvGrpSpPr/>
+        <p:nvPr/>
+      </p:nvGrpSpPr>
+      <p:grpSpPr>
+        <a:xfrm>
+          <a:off x="0" y="0"/>
+          <a:ext cx="0" cy="0"/>
+          <a:chOff x="0" y="0"/>
+          <a:chExt cx="0" cy="0"/>
+        </a:xfrm>
+      </p:grpSpPr>
+      <p:sp>
+        <p:nvSpPr>
+          <p:cNvPr id="3" name="object 3"/>
+          <p:cNvSpPr/>
+          <p:nvPr/>
+        </p:nvSpPr>
+        <p:spPr>
+          <a:xfrm>
+            <a:off x="3945635" y="2636520"/>
+            <a:ext cx="8246363" cy="1584959"/>
+          </a:xfrm>
+          <a:prstGeom prst="rect">
+            <a:avLst/>
+          </a:prstGeom>
+          <a:blipFill>
+            <a:blip r:embed="rId2" cstate="print"/>
+            <a:stretch>
+              <a:fillRect/>
+            </a:stretch>
+          </a:blipFill>
+        </p:spPr>
+        <p:txBody>
+          <a:bodyPr wrap="square" lIns="0" tIns="0" rIns="0" bIns="0" rtlCol="0"/>
+          <a:lstStyle/>
+          <a:p>
+            <a:endParaRPr/>
+          </a:p>
+        </p:txBody>
+      </p:sp>
+      <p:sp>
+        <p:nvSpPr>
+          <p:cNvPr id="4" name="object 4"/>
+          <p:cNvSpPr txBox="1">
+            <a:spLocks noGrp="1"/>
+          </p:cNvSpPr>
+          <p:nvPr>
+            <p:ph type="title"/>
+          </p:nvPr>
+        </p:nvSpPr>
+        <p:spPr>
+          <a:xfrm>
+            <a:off x="4513326" y="3165729"/>
+            <a:ext cx="2233295" cy="513715"/>
+          </a:xfrm>
+          <a:prstGeom prst="rect">
+            <a:avLst/>
+          </a:prstGeom>
+        </p:spPr>
+        <p:txBody>
+          <a:bodyPr vert="horz" wrap="square" lIns="0" tIns="13335" rIns="0" bIns="0" rtlCol="0">
+            <a:spAutoFit/>
+          </a:bodyPr>
+          <a:lstStyle/>
+          <a:p>
+            <a:pPr marL="12700">
+              <a:lnSpc>
+                <a:spcPct val="100000"/>
+              </a:lnSpc>
+              <a:spcBef>
+                <a:spcPts val="105"/>
+              </a:spcBef>
+            </a:pPr>
+            <a:r>
+              <a:rPr sz="3200" b="1" spc="-5" dirty="0">
+                <a:solidFill>
+                  <a:srgbClr val="FFFFFF"/>
+                </a:solidFill>
+                <a:latin typeface="Lucida Sans"/>
+                <a:cs typeface="Lucida Sans"/>
+              </a:rPr>
+              <a:t>Thank</a:t>
+            </a:r>
+            <a:r>
+              <a:rPr sz="3200" b="1" spc="-55" dirty="0">
+                <a:solidFill>
+                  <a:srgbClr val="FFFFFF"/>
+                </a:solidFill>
+                <a:latin typeface="Lucida Sans"/>
+                <a:cs typeface="Lucida Sans"/>
+              </a:rPr>
+              <a:t> </a:t>
+            </a:r>
+            <a:r>
+              <a:rPr sz="3200" b="1" dirty="0">
+                <a:solidFill>
+                  <a:srgbClr val="FFFFFF"/>
+                </a:solidFill>
+                <a:latin typeface="Lucida Sans"/>
+                <a:cs typeface="Lucida Sans"/>
+              </a:rPr>
+              <a:t>you</a:t>
+            </a:r>
+            <a:endParaRPr sz="3200">
+              <a:latin typeface="Lucida Sans"/>
+              <a:cs typeface="Lucida Sans"/>
+            </a:endParaRPr>
+          </a:p>
+        </p:txBody>
+      </p:sp>
+      <p:sp>
+        <p:nvSpPr>
+          <p:cNvPr id="5" name="Marcador de número de diapositiva 4">
+            <a:extLst>
+              <a:ext uri="{FF2B5EF4-FFF2-40B4-BE49-F238E27FC236}">
+                <a16:creationId xmlns:a16="http://schemas.microsoft.com/office/drawing/2014/main" id="{B052DA19-AD24-7D24-2AE9-51F8F5A7F5E0}"/>
+              </a:ext>
+            </a:extLst>
+          </p:cNvPr>
+          <p:cNvSpPr>
+            <a:spLocks noGrp="1"/>
+          </p:cNvSpPr>
+          <p:nvPr>
+            <p:ph type="sldNum" sz="quarter" idx="7"/>
+          </p:nvPr>
+        </p:nvSpPr>
+        <p:spPr/>
+        <p:txBody>
+          <a:bodyPr/>
+          <a:lstStyle/>
+          <a:p>
+            <a:fld id="{B6F15528-21DE-4FAA-801E-634DDDAF4B2B}" type="slidenum">
+              <a:rPr lang="es-ES" smtClean="0"/>
+              <a:t>10</a:t>
+            </a:fld>
+            <a:endParaRPr lang="es-ES"/>
+          </a:p>
+        </p:txBody>
+      </p:sp>
+    </p:spTree>
+  </p:cSld>
+  <p:clrMapOvr>
+    <a:masterClrMapping/>
+  </p:clrMapOvr>
+</p:sld>
+</file>
+
+<file path=ppt/slides/slide11.xml><?xml version="1.0" encoding="utf-8"?>
+<p:sld xmlns:a="http://schemas.openxmlformats.org/drawingml/2006/main" xmlns:r="http://schemas.openxmlformats.org/officeDocument/2006/relationships" xmlns:p="http://schemas.openxmlformats.org/presentationml/2006/main">
+  <p:cSld>
+    <p:spTree>
+      <p:nvGrpSpPr>
+        <p:cNvPr id="1" name=""/>
+        <p:cNvGrpSpPr/>
+        <p:nvPr/>
+      </p:nvGrpSpPr>
+      <p:grpSpPr>
+        <a:xfrm>
+          <a:off x="0" y="0"/>
+          <a:ext cx="0" cy="0"/>
+          <a:chOff x="0" y="0"/>
+          <a:chExt cx="0" cy="0"/>
+        </a:xfrm>
+      </p:grpSpPr>
+      <p:sp>
+        <p:nvSpPr>
+          <p:cNvPr id="2" name="Título 1">
+            <a:extLst>
+              <a:ext uri="{FF2B5EF4-FFF2-40B4-BE49-F238E27FC236}">
+                <a16:creationId xmlns:a16="http://schemas.microsoft.com/office/drawing/2014/main" id="{E7142EF5-74F6-4935-9D72-DB4F48743FFA}"/>
+              </a:ext>
+            </a:extLst>
+          </p:cNvPr>
+          <p:cNvSpPr>
+            <a:spLocks noGrp="1"/>
+          </p:cNvSpPr>
+          <p:nvPr>
+            <p:ph type="title"/>
+          </p:nvPr>
+        </p:nvSpPr>
+        <p:spPr/>
+        <p:txBody>
+          <a:bodyPr/>
+          <a:lstStyle/>
+          <a:p>
+            <a:endParaRPr lang="es-ES"/>
+          </a:p>
+        </p:txBody>
+      </p:sp>
+      <p:sp>
+        <p:nvSpPr>
+          <p:cNvPr id="3" name="Marcador de texto 2">
+            <a:extLst>
+              <a:ext uri="{FF2B5EF4-FFF2-40B4-BE49-F238E27FC236}">
+                <a16:creationId xmlns:a16="http://schemas.microsoft.com/office/drawing/2014/main" id="{92710A37-98E0-4CCF-8EF0-9D8D84970DD9}"/>
+              </a:ext>
+            </a:extLst>
+          </p:cNvPr>
+          <p:cNvSpPr>
+            <a:spLocks noGrp="1"/>
+          </p:cNvSpPr>
+          <p:nvPr>
+            <p:ph type="body" idx="1"/>
+          </p:nvPr>
+        </p:nvSpPr>
+        <p:spPr>
+          <a:xfrm>
+            <a:off x="609600" y="2152910"/>
+            <a:ext cx="10972800" cy="553998"/>
+          </a:xfrm>
+        </p:spPr>
+        <p:txBody>
+          <a:bodyPr/>
+          <a:lstStyle/>
+          <a:p>
+            <a:r>
+              <a:rPr lang="es-ES" sz="1200" dirty="0"/>
+              <a:t>De pendiendo de la distancia  a la que se corta la longitud del MMI se va a tener una autoimagen determinada</a:t>
+            </a:r>
+          </a:p>
+          <a:p>
+            <a:endParaRPr lang="es-ES" sz="1200" dirty="0"/>
+          </a:p>
+          <a:p>
+            <a:r>
+              <a:rPr lang="es-ES" sz="1200" dirty="0"/>
+              <a:t>Calcular …, …, </a:t>
+            </a:r>
+            <a:r>
+              <a:rPr lang="es-ES" sz="1200" dirty="0" err="1"/>
+              <a:t>L_pi</a:t>
+            </a:r>
+            <a:endParaRPr lang="es-ES" sz="1200" dirty="0"/>
+          </a:p>
+        </p:txBody>
+      </p:sp>
+      <p:sp>
+        <p:nvSpPr>
+          <p:cNvPr id="4" name="Marcador de pie de página 3">
+            <a:extLst>
+              <a:ext uri="{FF2B5EF4-FFF2-40B4-BE49-F238E27FC236}">
+                <a16:creationId xmlns:a16="http://schemas.microsoft.com/office/drawing/2014/main" id="{04DDB22E-DB66-41AA-A98E-87234657D449}"/>
+              </a:ext>
+            </a:extLst>
+          </p:cNvPr>
+          <p:cNvSpPr>
+            <a:spLocks noGrp="1"/>
+          </p:cNvSpPr>
+          <p:nvPr>
+            <p:ph type="ftr" sz="quarter" idx="5"/>
+          </p:nvPr>
+        </p:nvSpPr>
+        <p:spPr/>
+        <p:txBody>
+          <a:bodyPr/>
+          <a:lstStyle/>
+          <a:p>
+            <a:pPr marL="12700">
+              <a:spcBef>
+                <a:spcPts val="15"/>
+              </a:spcBef>
+            </a:pPr>
+            <a:r>
+              <a:rPr lang="es-ES" spc="-5"/>
+              <a:t>LAB 0.2. COUPLERS</a:t>
+            </a:r>
+            <a:endParaRPr lang="es-ES" spc="-5" dirty="0"/>
+          </a:p>
+        </p:txBody>
+      </p:sp>
+      <p:sp>
+        <p:nvSpPr>
+          <p:cNvPr id="5" name="Marcador de número de diapositiva 4">
+            <a:extLst>
+              <a:ext uri="{FF2B5EF4-FFF2-40B4-BE49-F238E27FC236}">
+                <a16:creationId xmlns:a16="http://schemas.microsoft.com/office/drawing/2014/main" id="{953D5AE1-CE5A-4543-9BE3-C8AA193522C0}"/>
+              </a:ext>
+            </a:extLst>
+          </p:cNvPr>
+          <p:cNvSpPr>
+            <a:spLocks noGrp="1"/>
+          </p:cNvSpPr>
+          <p:nvPr>
+            <p:ph type="sldNum" sz="quarter" idx="7"/>
+          </p:nvPr>
+        </p:nvSpPr>
+        <p:spPr/>
+        <p:txBody>
+          <a:bodyPr/>
+          <a:lstStyle/>
+          <a:p>
+            <a:fld id="{B6F15528-21DE-4FAA-801E-634DDDAF4B2B}" type="slidenum">
+              <a:rPr lang="es-ES" smtClean="0"/>
+              <a:t>11</a:t>
+            </a:fld>
+            <a:endParaRPr lang="es-ES"/>
+          </a:p>
+        </p:txBody>
+      </p:sp>
+    </p:spTree>
+    <p:extLst>
+      <p:ext uri="{BB962C8B-B14F-4D97-AF65-F5344CB8AC3E}">
+        <p14:creationId xmlns:p14="http://schemas.microsoft.com/office/powerpoint/2010/main" val="580800172"/>
+      </p:ext>
+    </p:extLst>
   </p:cSld>
   <p:clrMapOvr>
     <a:masterClrMapping/>
@@ -5028,8 +5362,8 @@
           </p:sp>
         </mc:Fallback>
       </mc:AlternateContent>
-      <mc:AlternateContent xmlns:mc="http://schemas.openxmlformats.org/markup-compatibility/2006" xmlns:a14="http://schemas.microsoft.com/office/drawing/2010/main">
-        <mc:Choice Requires="a14">
+      <mc:AlternateContent xmlns:mc="http://schemas.openxmlformats.org/markup-compatibility/2006">
+        <mc:Choice xmlns:a14="http://schemas.microsoft.com/office/drawing/2010/main" Requires="a14">
           <p:sp>
             <p:nvSpPr>
               <p:cNvPr id="2" name="CuadroTexto 1">
@@ -5104,7 +5438,21 @@
                     <a:latin typeface="Arial" panose="020B0604020202020204" pitchFamily="34" charset="0"/>
                     <a:cs typeface="Arial" panose="020B0604020202020204" pitchFamily="34" charset="0"/>
                   </a:rPr>
-                  <a:t> la longitude de batido </a:t>
+                  <a:t> la </a:t>
+                </a:r>
+                <a:r>
+                  <a:rPr lang="en-US" sz="1200" dirty="0" err="1">
+                    <a:latin typeface="Arial" panose="020B0604020202020204" pitchFamily="34" charset="0"/>
+                    <a:cs typeface="Arial" panose="020B0604020202020204" pitchFamily="34" charset="0"/>
+                  </a:rPr>
+                  <a:t>longitud</a:t>
+                </a:r>
+                <a:r>
+                  <a:rPr lang="en-US" sz="1200" dirty="0">
+                    <a:latin typeface="Arial" panose="020B0604020202020204" pitchFamily="34" charset="0"/>
+                    <a:cs typeface="Arial" panose="020B0604020202020204" pitchFamily="34" charset="0"/>
+                  </a:rPr>
+                  <a:t> de batido </a:t>
                 </a:r>
                 <a14:m>
                   <m:oMath xmlns:m="http://schemas.openxmlformats.org/officeDocument/2006/math">
@@ -5400,7 +5748,7 @@
                     <a:latin typeface="Arial" panose="020B0604020202020204" pitchFamily="34" charset="0"/>
                     <a:cs typeface="Arial" panose="020B0604020202020204" pitchFamily="34" charset="0"/>
                   </a:rPr>
-                  <a:t>)</a:t>
+                  <a:t>).</a:t>
                 </a:r>
               </a:p>
               <a:p>
@@ -5462,7 +5810,7 @@
             </p:txBody>
           </p:sp>
         </mc:Choice>
-        <mc:Fallback xmlns="">
+        <mc:Fallback>
           <p:sp>
             <p:nvSpPr>
               <p:cNvPr id="2" name="CuadroTexto 1">
@@ -5512,6 +5860,36 @@
           </p:sp>
         </mc:Fallback>
       </mc:AlternateContent>
+      <p:pic>
+        <p:nvPicPr>
+          <p:cNvPr id="6" name="Imagen 5">
+            <a:extLst>
+              <a:ext uri="{FF2B5EF4-FFF2-40B4-BE49-F238E27FC236}">
+                <a16:creationId xmlns:a16="http://schemas.microsoft.com/office/drawing/2014/main" id="{11DE5FBC-CB21-4435-AB97-167E5CDC3BAB}"/>
+              </a:ext>
+            </a:extLst>
+          </p:cNvPr>
+          <p:cNvPicPr>
+            <a:picLocks noChangeAspect="1"/>
+          </p:cNvPicPr>
+          <p:nvPr/>
+        </p:nvPicPr>
+        <p:blipFill>
+          <a:blip r:embed="rId7"/>
+          <a:stretch>
+            <a:fillRect/>
+          </a:stretch>
+        </p:blipFill>
+        <p:spPr>
+          <a:xfrm>
+            <a:off x="3886200" y="4648200"/>
+            <a:ext cx="3876144" cy="1309870"/>
+          </a:xfrm>
+          <a:prstGeom prst="rect">
+            <a:avLst/>
+          </a:prstGeom>
+        </p:spPr>
+      </p:pic>
     </p:spTree>
     <p:extLst>
       <p:ext uri="{BB962C8B-B14F-4D97-AF65-F5344CB8AC3E}">
@@ -5560,8 +5938,8 @@
         </p:nvSpPr>
         <p:spPr>
           <a:xfrm>
-            <a:off x="609600" y="914400"/>
-            <a:ext cx="10972800" cy="1661993"/>
+            <a:off x="601133" y="1447800"/>
+            <a:ext cx="10972800" cy="2154436"/>
           </a:xfrm>
         </p:spPr>
         <p:txBody>
@@ -5569,61 +5947,61 @@
           <a:lstStyle/>
           <a:p>
             <a:r>
-              <a:rPr lang="es-ES" sz="1200" dirty="0"/>
+              <a:rPr lang="es-ES" sz="1400" dirty="0"/>
               <a:t>Índices efectivos para los 6 primeros modos:</a:t>
             </a:r>
           </a:p>
           <a:p>
             <a:r>
-              <a:rPr lang="es-ES" sz="1200" dirty="0"/>
+              <a:rPr lang="es-ES" sz="1400" dirty="0"/>
               <a:t>[1.60942484+1.02849974e-04j 1.60116589+9.83178135e-05j</a:t>
             </a:r>
           </a:p>
           <a:p>
             <a:r>
-              <a:rPr lang="es-ES" sz="1200" dirty="0"/>
+              <a:rPr lang="es-ES" sz="1400" dirty="0"/>
               <a:t> 1.53540293+1.77367472e-04j 1.52057329+1.77190584e-04j</a:t>
             </a:r>
           </a:p>
           <a:p>
             <a:r>
-              <a:rPr lang="es-ES" sz="1200" dirty="0"/>
+              <a:rPr lang="es-ES" sz="1400" dirty="0"/>
               <a:t> 1.45637592+1.78980401e-04j 1.44042642+2.10123701e-04j]</a:t>
             </a:r>
           </a:p>
           <a:p>
             <a:r>
-              <a:rPr lang="es-ES" sz="1200" dirty="0"/>
+              <a:rPr lang="es-ES" sz="1400" dirty="0"/>
               <a:t>Si nos fijamos en la parte real, podemos observar que se propagan los 5 primeros modos menos el último, ya que este ve un índice efectivo menor al del </a:t>
             </a:r>
             <a:r>
-              <a:rPr lang="es-ES" sz="1200" dirty="0" err="1"/>
+              <a:rPr lang="es-ES" sz="1400" dirty="0" err="1"/>
               <a:t>cladding</a:t>
             </a:r>
             <a:r>
-              <a:rPr lang="es-ES" sz="1200" dirty="0"/>
+              <a:rPr lang="es-ES" sz="1400" dirty="0"/>
               <a:t> (1.44).</a:t>
             </a:r>
           </a:p>
           <a:p>
-            <a:endParaRPr lang="es-ES" sz="1200" dirty="0"/>
-          </a:p>
-          <a:p>
-            <a:r>
-              <a:rPr lang="es-ES" sz="1200" dirty="0"/>
+            <a:endParaRPr lang="es-ES" sz="1400" dirty="0"/>
+          </a:p>
+          <a:p>
+            <a:r>
+              <a:rPr lang="es-ES" sz="1400" dirty="0"/>
               <a:t>Análisis del porcentaje de TE de cada modo:</a:t>
             </a:r>
           </a:p>
           <a:p>
             <a:r>
-              <a:rPr lang="en-US" sz="1200" dirty="0"/>
+              <a:rPr lang="en-US" sz="1400" dirty="0"/>
               <a:t>array([0.994898  , 0.99527537, 0.00888064, 0.01130183, 0.97648502, 0.35301659])</a:t>
             </a:r>
           </a:p>
           <a:p>
             <a:r>
-              <a:rPr lang="es-ES" sz="1200" dirty="0"/>
-              <a:t>Podemos observar que los modos que serán más TE son el 1,2 y 5, mientras que los otros tres tendrán mayor componente TM</a:t>
+              <a:rPr lang="es-ES" sz="1400" dirty="0"/>
+              <a:t>Podemos observar que los modos que serán más TE son el 1,2 y 5, mientras que los otros tres tendrán mayor componente TM.</a:t>
             </a:r>
           </a:p>
         </p:txBody>
@@ -5925,7 +6303,7 @@
         </p:blipFill>
         <p:spPr>
           <a:xfrm>
-            <a:off x="814375" y="2513718"/>
+            <a:off x="780508" y="2030250"/>
             <a:ext cx="2446794" cy="1672764"/>
           </a:xfrm>
           <a:prstGeom prst="rect">
@@ -5947,7 +6325,7 @@
         </p:nvSpPr>
         <p:spPr>
           <a:xfrm>
-            <a:off x="457200" y="1820851"/>
+            <a:off x="423333" y="1337383"/>
             <a:ext cx="3566583" cy="461665"/>
           </a:xfrm>
           <a:prstGeom prst="rect">
@@ -5996,7 +6374,7 @@
         </p:nvSpPr>
         <p:spPr>
           <a:xfrm>
-            <a:off x="4419600" y="1805421"/>
+            <a:off x="4267200" y="1337383"/>
             <a:ext cx="3810000" cy="646331"/>
           </a:xfrm>
           <a:prstGeom prst="rect">
@@ -6053,7 +6431,7 @@
         </p:blipFill>
         <p:spPr>
           <a:xfrm>
-            <a:off x="4800600" y="2537285"/>
+            <a:off x="4572000" y="2058530"/>
             <a:ext cx="2766144" cy="1852031"/>
           </a:xfrm>
           <a:prstGeom prst="rect">
@@ -6083,8 +6461,8 @@
         </p:blipFill>
         <p:spPr>
           <a:xfrm>
-            <a:off x="8580169" y="2384573"/>
-            <a:ext cx="3108861" cy="2077915"/>
+            <a:off x="8387951" y="4017045"/>
+            <a:ext cx="2925300" cy="1955225"/>
           </a:xfrm>
           <a:prstGeom prst="rect">
             <a:avLst/>
@@ -6105,7 +6483,7 @@
         </p:nvSpPr>
         <p:spPr>
           <a:xfrm>
-            <a:off x="8229600" y="1738108"/>
+            <a:off x="8077200" y="1337383"/>
             <a:ext cx="3810000" cy="461665"/>
           </a:xfrm>
           <a:prstGeom prst="rect">
@@ -6156,7 +6534,7 @@
         </p:blipFill>
         <p:spPr>
           <a:xfrm>
-            <a:off x="814375" y="4495800"/>
+            <a:off x="780508" y="4012332"/>
             <a:ext cx="2562249" cy="1746988"/>
           </a:xfrm>
           <a:prstGeom prst="rect">
@@ -6178,7 +6556,7 @@
         </p:nvSpPr>
         <p:spPr>
           <a:xfrm>
-            <a:off x="457200" y="1053093"/>
+            <a:off x="457200" y="800903"/>
             <a:ext cx="10991850" cy="276999"/>
           </a:xfrm>
           <a:prstGeom prst="rect">
@@ -6194,11 +6572,71 @@
           <a:p>
             <a:r>
               <a:rPr lang="es-ES" sz="1200" dirty="0"/>
-              <a:t>A continuación se va a mostrar la sección transversal de los modos. En la parte de arriba se muestra el análisis del modo TE y en el modo TM. </a:t>
-            </a:r>
-          </a:p>
-        </p:txBody>
-      </p:sp>
+              <a:t>A continuación se va a mostrar la sección transversal de los modos. En la parte de arriba se muestra el análisis del modo TE y en la parte de abajo el modo TM. </a:t>
+            </a:r>
+          </a:p>
+        </p:txBody>
+      </p:sp>
+      <p:pic>
+        <p:nvPicPr>
+          <p:cNvPr id="3" name="Imagen 2">
+            <a:extLst>
+              <a:ext uri="{FF2B5EF4-FFF2-40B4-BE49-F238E27FC236}">
+                <a16:creationId xmlns:a16="http://schemas.microsoft.com/office/drawing/2014/main" id="{94B7BFF1-FFA2-4857-9D5B-640E5E49B4B2}"/>
+              </a:ext>
+            </a:extLst>
+          </p:cNvPr>
+          <p:cNvPicPr>
+            <a:picLocks noChangeAspect="1"/>
+          </p:cNvPicPr>
+          <p:nvPr/>
+        </p:nvPicPr>
+        <p:blipFill>
+          <a:blip r:embed="rId6"/>
+          <a:stretch>
+            <a:fillRect/>
+          </a:stretch>
+        </p:blipFill>
+        <p:spPr>
+          <a:xfrm>
+            <a:off x="4484328" y="4017045"/>
+            <a:ext cx="2766144" cy="1881171"/>
+          </a:xfrm>
+          <a:prstGeom prst="rect">
+            <a:avLst/>
+          </a:prstGeom>
+        </p:spPr>
+      </p:pic>
+      <p:pic>
+        <p:nvPicPr>
+          <p:cNvPr id="7" name="Imagen 6">
+            <a:extLst>
+              <a:ext uri="{FF2B5EF4-FFF2-40B4-BE49-F238E27FC236}">
+                <a16:creationId xmlns:a16="http://schemas.microsoft.com/office/drawing/2014/main" id="{C94E018B-2499-44F0-B788-3F424A53201C}"/>
+              </a:ext>
+            </a:extLst>
+          </p:cNvPr>
+          <p:cNvPicPr>
+            <a:picLocks noChangeAspect="1"/>
+          </p:cNvPicPr>
+          <p:nvPr/>
+        </p:nvPicPr>
+        <p:blipFill>
+          <a:blip r:embed="rId7"/>
+          <a:stretch>
+            <a:fillRect/>
+          </a:stretch>
+        </p:blipFill>
+        <p:spPr>
+          <a:xfrm>
+            <a:off x="8547955" y="2058529"/>
+            <a:ext cx="2723295" cy="1852031"/>
+          </a:xfrm>
+          <a:prstGeom prst="rect">
+            <a:avLst/>
+          </a:prstGeom>
+        </p:spPr>
+      </p:pic>
     </p:spTree>
     <p:extLst>
       <p:ext uri="{BB962C8B-B14F-4D97-AF65-F5344CB8AC3E}">
@@ -6376,7 +6814,7 @@
         </p:nvSpPr>
         <p:spPr>
           <a:xfrm>
-            <a:off x="8153400" y="983258"/>
+            <a:off x="7924800" y="989548"/>
             <a:ext cx="3810000" cy="646331"/>
           </a:xfrm>
           <a:prstGeom prst="rect">
@@ -6479,8 +6917,8 @@
         </p:blipFill>
         <p:spPr>
           <a:xfrm>
-            <a:off x="599017" y="2017905"/>
-            <a:ext cx="2920583" cy="1960460"/>
+            <a:off x="835340" y="3723663"/>
+            <a:ext cx="2744347" cy="1842160"/>
           </a:xfrm>
           <a:prstGeom prst="rect">
             <a:avLst/>
@@ -6509,8 +6947,8 @@
         </p:blipFill>
         <p:spPr>
           <a:xfrm>
-            <a:off x="4611846" y="2034838"/>
-            <a:ext cx="2928091" cy="1960460"/>
+            <a:off x="4594390" y="2006206"/>
+            <a:ext cx="2751401" cy="1842160"/>
           </a:xfrm>
           <a:prstGeom prst="rect">
             <a:avLst/>
@@ -6539,8 +6977,98 @@
         </p:blipFill>
         <p:spPr>
           <a:xfrm>
-            <a:off x="8618900" y="2026371"/>
-            <a:ext cx="2857834" cy="1943527"/>
+            <a:off x="8465183" y="3723663"/>
+            <a:ext cx="2751400" cy="1871145"/>
+          </a:xfrm>
+          <a:prstGeom prst="rect">
+            <a:avLst/>
+          </a:prstGeom>
+        </p:spPr>
+      </p:pic>
+      <p:pic>
+        <p:nvPicPr>
+          <p:cNvPr id="3" name="Imagen 2">
+            <a:extLst>
+              <a:ext uri="{FF2B5EF4-FFF2-40B4-BE49-F238E27FC236}">
+                <a16:creationId xmlns:a16="http://schemas.microsoft.com/office/drawing/2014/main" id="{1C031CBC-D966-4D11-8BB4-F00474D67910}"/>
+              </a:ext>
+            </a:extLst>
+          </p:cNvPr>
+          <p:cNvPicPr>
+            <a:picLocks noChangeAspect="1"/>
+          </p:cNvPicPr>
+          <p:nvPr/>
+        </p:nvPicPr>
+        <p:blipFill>
+          <a:blip r:embed="rId5"/>
+          <a:stretch>
+            <a:fillRect/>
+          </a:stretch>
+        </p:blipFill>
+        <p:spPr>
+          <a:xfrm>
+            <a:off x="820744" y="2006205"/>
+            <a:ext cx="2708780" cy="1842160"/>
+          </a:xfrm>
+          <a:prstGeom prst="rect">
+            <a:avLst/>
+          </a:prstGeom>
+        </p:spPr>
+      </p:pic>
+      <p:pic>
+        <p:nvPicPr>
+          <p:cNvPr id="8" name="Imagen 7">
+            <a:extLst>
+              <a:ext uri="{FF2B5EF4-FFF2-40B4-BE49-F238E27FC236}">
+                <a16:creationId xmlns:a16="http://schemas.microsoft.com/office/drawing/2014/main" id="{A23E11D5-9F27-4A6B-AA47-E637DDC9103F}"/>
+              </a:ext>
+            </a:extLst>
+          </p:cNvPr>
+          <p:cNvPicPr>
+            <a:picLocks noChangeAspect="1"/>
+          </p:cNvPicPr>
+          <p:nvPr/>
+        </p:nvPicPr>
+        <p:blipFill>
+          <a:blip r:embed="rId6"/>
+          <a:stretch>
+            <a:fillRect/>
+          </a:stretch>
+        </p:blipFill>
+        <p:spPr>
+          <a:xfrm>
+            <a:off x="4594389" y="3693826"/>
+            <a:ext cx="2751400" cy="1904815"/>
+          </a:xfrm>
+          <a:prstGeom prst="rect">
+            <a:avLst/>
+          </a:prstGeom>
+        </p:spPr>
+      </p:pic>
+      <p:pic>
+        <p:nvPicPr>
+          <p:cNvPr id="12" name="Imagen 11">
+            <a:extLst>
+              <a:ext uri="{FF2B5EF4-FFF2-40B4-BE49-F238E27FC236}">
+                <a16:creationId xmlns:a16="http://schemas.microsoft.com/office/drawing/2014/main" id="{2802E534-3703-4DB3-9113-79233D16852D}"/>
+              </a:ext>
+            </a:extLst>
+          </p:cNvPr>
+          <p:cNvPicPr>
+            <a:picLocks noChangeAspect="1"/>
+          </p:cNvPicPr>
+          <p:nvPr/>
+        </p:nvPicPr>
+        <p:blipFill>
+          <a:blip r:embed="rId7"/>
+          <a:stretch>
+            <a:fillRect/>
+          </a:stretch>
+        </p:blipFill>
+        <p:spPr>
+          <a:xfrm>
+            <a:off x="8359656" y="1961806"/>
+            <a:ext cx="2892231" cy="1966919"/>
           </a:xfrm>
           <a:prstGeom prst="rect">
             <a:avLst/>
@@ -7012,89 +7540,617 @@
           </p:sp>
         </mc:Fallback>
       </mc:AlternateContent>
-      <p:sp>
-        <p:nvSpPr>
-          <p:cNvPr id="2" name="CuadroTexto 1">
+      <mc:AlternateContent xmlns:mc="http://schemas.openxmlformats.org/markup-compatibility/2006">
+        <mc:Choice xmlns:a14="http://schemas.microsoft.com/office/drawing/2010/main" Requires="a14">
+          <p:sp>
+            <p:nvSpPr>
+              <p:cNvPr id="2" name="CuadroTexto 1">
+                <a:extLst>
+                  <a:ext uri="{FF2B5EF4-FFF2-40B4-BE49-F238E27FC236}">
+                    <a16:creationId xmlns:a16="http://schemas.microsoft.com/office/drawing/2014/main" id="{FDE3A197-9508-F9F1-1FEB-FF883D78C151}"/>
+                  </a:ext>
+                </a:extLst>
+              </p:cNvPr>
+              <p:cNvSpPr txBox="1"/>
+              <p:nvPr/>
+            </p:nvSpPr>
+            <p:spPr>
+              <a:xfrm>
+                <a:off x="518056" y="3774468"/>
+                <a:ext cx="11199971" cy="2492990"/>
+              </a:xfrm>
+              <a:prstGeom prst="rect">
+                <a:avLst/>
+              </a:prstGeom>
+              <a:solidFill>
+                <a:schemeClr val="bg1">
+                  <a:lumMod val="95000"/>
+                </a:schemeClr>
+              </a:solidFill>
+              <a:ln w="28575">
+                <a:solidFill>
+                  <a:srgbClr val="E0700D"/>
+                </a:solidFill>
+              </a:ln>
+            </p:spPr>
+            <p:txBody>
+              <a:bodyPr wrap="square" rtlCol="0">
+                <a:spAutoFit/>
+              </a:bodyPr>
+              <a:lstStyle/>
+              <a:p>
+                <a:pPr algn="just"/>
+                <a:r>
+                  <a:rPr lang="en-US" sz="1200" dirty="0">
+                    <a:latin typeface="Arial" panose="020B0604020202020204" pitchFamily="34" charset="0"/>
+                    <a:cs typeface="Arial" panose="020B0604020202020204" pitchFamily="34" charset="0"/>
+                  </a:rPr>
+                  <a:t>Document all your results (neff, plot fields of different modes, comparison between different polarizations…)</a:t>
+                </a:r>
+              </a:p>
+              <a:p>
+                <a:pPr algn="just"/>
+                <a:endParaRPr lang="en-US" sz="1200" dirty="0">
+                  <a:latin typeface="Arial" panose="020B0604020202020204" pitchFamily="34" charset="0"/>
+                  <a:cs typeface="Arial" panose="020B0604020202020204" pitchFamily="34" charset="0"/>
+                </a:endParaRPr>
+              </a:p>
+              <a:p>
+                <a:pPr algn="just"/>
+                <a:r>
+                  <a:rPr lang="en-US" sz="1200" dirty="0">
+                    <a:latin typeface="Arial" panose="020B0604020202020204" pitchFamily="34" charset="0"/>
+                    <a:cs typeface="Arial" panose="020B0604020202020204" pitchFamily="34" charset="0"/>
+                  </a:rPr>
+                  <a:t>La </a:t>
+                </a:r>
+                <a:r>
+                  <a:rPr lang="en-US" sz="1200" dirty="0" err="1">
+                    <a:latin typeface="Arial" panose="020B0604020202020204" pitchFamily="34" charset="0"/>
+                    <a:cs typeface="Arial" panose="020B0604020202020204" pitchFamily="34" charset="0"/>
+                  </a:rPr>
+                  <a:t>longitud</a:t>
+                </a:r>
+                <a:r>
+                  <a:rPr lang="en-US" sz="1200" dirty="0">
+                    <a:latin typeface="Arial" panose="020B0604020202020204" pitchFamily="34" charset="0"/>
+                    <a:cs typeface="Arial" panose="020B0604020202020204" pitchFamily="34" charset="0"/>
+                  </a:rPr>
+                  <a:t> de batido </a:t>
+                </a:r>
+                <a14:m>
+                  <m:oMath xmlns:m="http://schemas.openxmlformats.org/officeDocument/2006/math">
+                    <m:sSub>
+                      <m:sSubPr>
+                        <m:ctrlPr>
+                          <a:rPr lang="es-ES" sz="1200" b="0" i="1" smtClean="0">
+                            <a:latin typeface="Cambria Math" panose="02040503050406030204" pitchFamily="18" charset="0"/>
+                          </a:rPr>
+                        </m:ctrlPr>
+                      </m:sSubPr>
+                      <m:e>
+                        <m:r>
+                          <a:rPr lang="es-ES" sz="1200" b="0" i="1" smtClean="0">
+                            <a:latin typeface="Cambria Math" panose="02040503050406030204" pitchFamily="18" charset="0"/>
+                          </a:rPr>
+                          <m:t>𝐿</m:t>
+                        </m:r>
+                      </m:e>
+                      <m:sub>
+                        <m:r>
+                          <a:rPr lang="es-ES" sz="1200" b="0" i="1" smtClean="0">
+                            <a:latin typeface="Cambria Math" panose="02040503050406030204" pitchFamily="18" charset="0"/>
+                          </a:rPr>
+                          <m:t>𝜋</m:t>
+                        </m:r>
+                      </m:sub>
+                    </m:sSub>
+                  </m:oMath>
+                </a14:m>
+                <a:r>
+                  <a:rPr lang="en-US" sz="1200" dirty="0">
+                    <a:latin typeface="Arial" panose="020B0604020202020204" pitchFamily="34" charset="0"/>
+                    <a:cs typeface="Arial" panose="020B0604020202020204" pitchFamily="34" charset="0"/>
+                  </a:rPr>
+                  <a:t> se </a:t>
+                </a:r>
+                <a:r>
+                  <a:rPr lang="en-US" sz="1200" dirty="0" err="1">
+                    <a:latin typeface="Arial" panose="020B0604020202020204" pitchFamily="34" charset="0"/>
+                    <a:cs typeface="Arial" panose="020B0604020202020204" pitchFamily="34" charset="0"/>
+                  </a:rPr>
+                  <a:t>obtiene</a:t>
+                </a:r>
+                <a:r>
+                  <a:rPr lang="en-US" sz="1200" dirty="0">
+                    <a:latin typeface="Arial" panose="020B0604020202020204" pitchFamily="34" charset="0"/>
+                    <a:cs typeface="Arial" panose="020B0604020202020204" pitchFamily="34" charset="0"/>
+                  </a:rPr>
+                  <a:t> </a:t>
+                </a:r>
+                <a:r>
+                  <a:rPr lang="en-US" sz="1200" dirty="0" err="1">
+                    <a:latin typeface="Arial" panose="020B0604020202020204" pitchFamily="34" charset="0"/>
+                    <a:cs typeface="Arial" panose="020B0604020202020204" pitchFamily="34" charset="0"/>
+                  </a:rPr>
+                  <a:t>tomando</a:t>
+                </a:r>
+                <a:r>
+                  <a:rPr lang="en-US" sz="1200" dirty="0">
+                    <a:latin typeface="Arial" panose="020B0604020202020204" pitchFamily="34" charset="0"/>
+                    <a:cs typeface="Arial" panose="020B0604020202020204" pitchFamily="34" charset="0"/>
+                  </a:rPr>
+                  <a:t> los </a:t>
+                </a:r>
+                <a:r>
+                  <a:rPr lang="en-US" sz="1200" dirty="0" err="1">
+                    <a:latin typeface="Arial" panose="020B0604020202020204" pitchFamily="34" charset="0"/>
+                    <a:cs typeface="Arial" panose="020B0604020202020204" pitchFamily="34" charset="0"/>
+                  </a:rPr>
+                  <a:t>valores</a:t>
+                </a:r>
+                <a:r>
+                  <a:rPr lang="en-US" sz="1200" dirty="0">
+                    <a:latin typeface="Arial" panose="020B0604020202020204" pitchFamily="34" charset="0"/>
+                    <a:cs typeface="Arial" panose="020B0604020202020204" pitchFamily="34" charset="0"/>
+                  </a:rPr>
+                  <a:t> </a:t>
+                </a:r>
+                <a:r>
+                  <a:rPr lang="en-US" sz="1200" dirty="0" err="1">
+                    <a:latin typeface="Arial" panose="020B0604020202020204" pitchFamily="34" charset="0"/>
+                    <a:cs typeface="Arial" panose="020B0604020202020204" pitchFamily="34" charset="0"/>
+                  </a:rPr>
+                  <a:t>numéricos</a:t>
+                </a:r>
+                <a:r>
+                  <a:rPr lang="en-US" sz="1200" dirty="0">
+                    <a:latin typeface="Arial" panose="020B0604020202020204" pitchFamily="34" charset="0"/>
+                    <a:cs typeface="Arial" panose="020B0604020202020204" pitchFamily="34" charset="0"/>
+                  </a:rPr>
+                  <a:t> de dos </a:t>
+                </a:r>
+                <a:r>
+                  <a:rPr lang="en-US" sz="1200" dirty="0" err="1">
+                    <a:latin typeface="Arial" panose="020B0604020202020204" pitchFamily="34" charset="0"/>
+                    <a:cs typeface="Arial" panose="020B0604020202020204" pitchFamily="34" charset="0"/>
+                  </a:rPr>
+                  <a:t>índices</a:t>
+                </a:r>
+                <a:r>
+                  <a:rPr lang="en-US" sz="1200" dirty="0">
+                    <a:latin typeface="Arial" panose="020B0604020202020204" pitchFamily="34" charset="0"/>
+                    <a:cs typeface="Arial" panose="020B0604020202020204" pitchFamily="34" charset="0"/>
+                  </a:rPr>
+                  <a:t> </a:t>
+                </a:r>
+                <a:r>
+                  <a:rPr lang="en-US" sz="1200" dirty="0" err="1">
+                    <a:latin typeface="Arial" panose="020B0604020202020204" pitchFamily="34" charset="0"/>
+                    <a:cs typeface="Arial" panose="020B0604020202020204" pitchFamily="34" charset="0"/>
+                  </a:rPr>
+                  <a:t>efectivos</a:t>
+                </a:r>
+                <a:r>
+                  <a:rPr lang="en-US" sz="1200" dirty="0">
+                    <a:latin typeface="Arial" panose="020B0604020202020204" pitchFamily="34" charset="0"/>
+                    <a:cs typeface="Arial" panose="020B0604020202020204" pitchFamily="34" charset="0"/>
+                  </a:rPr>
+                  <a:t> (</a:t>
+                </a:r>
+                <a:r>
+                  <a:rPr lang="en-US" sz="1200" dirty="0" err="1">
+                    <a:latin typeface="Arial" panose="020B0604020202020204" pitchFamily="34" charset="0"/>
+                    <a:cs typeface="Arial" panose="020B0604020202020204" pitchFamily="34" charset="0"/>
+                  </a:rPr>
+                  <a:t>en</a:t>
+                </a:r>
+                <a:r>
+                  <a:rPr lang="en-US" sz="1200" dirty="0">
+                    <a:latin typeface="Arial" panose="020B0604020202020204" pitchFamily="34" charset="0"/>
+                    <a:cs typeface="Arial" panose="020B0604020202020204" pitchFamily="34" charset="0"/>
+                  </a:rPr>
+                  <a:t> </a:t>
+                </a:r>
+                <a:r>
+                  <a:rPr lang="en-US" sz="1200" dirty="0" err="1">
+                    <a:latin typeface="Arial" panose="020B0604020202020204" pitchFamily="34" charset="0"/>
+                    <a:cs typeface="Arial" panose="020B0604020202020204" pitchFamily="34" charset="0"/>
+                  </a:rPr>
+                  <a:t>este</a:t>
+                </a:r>
+                <a:r>
+                  <a:rPr lang="en-US" sz="1200" dirty="0">
+                    <a:latin typeface="Arial" panose="020B0604020202020204" pitchFamily="34" charset="0"/>
+                    <a:cs typeface="Arial" panose="020B0604020202020204" pitchFamily="34" charset="0"/>
+                  </a:rPr>
+                  <a:t> </a:t>
+                </a:r>
+                <a:r>
+                  <a:rPr lang="en-US" sz="1200" dirty="0" err="1">
+                    <a:latin typeface="Arial" panose="020B0604020202020204" pitchFamily="34" charset="0"/>
+                    <a:cs typeface="Arial" panose="020B0604020202020204" pitchFamily="34" charset="0"/>
+                  </a:rPr>
+                  <a:t>caso</a:t>
+                </a:r>
+                <a:r>
+                  <a:rPr lang="en-US" sz="1200" dirty="0">
+                    <a:latin typeface="Arial" panose="020B0604020202020204" pitchFamily="34" charset="0"/>
+                    <a:cs typeface="Arial" panose="020B0604020202020204" pitchFamily="34" charset="0"/>
+                  </a:rPr>
+                  <a:t>, </a:t>
+                </a:r>
+                <a:r>
+                  <a:rPr lang="en-US" sz="1200" dirty="0" err="1">
+                    <a:latin typeface="Arial" panose="020B0604020202020204" pitchFamily="34" charset="0"/>
+                    <a:cs typeface="Arial" panose="020B0604020202020204" pitchFamily="34" charset="0"/>
+                  </a:rPr>
+                  <a:t>el</a:t>
+                </a:r>
+                <a:r>
+                  <a:rPr lang="en-US" sz="1200" dirty="0">
+                    <a:latin typeface="Arial" panose="020B0604020202020204" pitchFamily="34" charset="0"/>
+                    <a:cs typeface="Arial" panose="020B0604020202020204" pitchFamily="34" charset="0"/>
+                  </a:rPr>
+                  <a:t> primer y </a:t>
+                </a:r>
+                <a:r>
+                  <a:rPr lang="en-US" sz="1200" dirty="0" err="1">
+                    <a:latin typeface="Arial" panose="020B0604020202020204" pitchFamily="34" charset="0"/>
+                    <a:cs typeface="Arial" panose="020B0604020202020204" pitchFamily="34" charset="0"/>
+                  </a:rPr>
+                  <a:t>segundo</a:t>
+                </a:r>
+                <a:r>
+                  <a:rPr lang="en-US" sz="1200" dirty="0">
+                    <a:latin typeface="Arial" panose="020B0604020202020204" pitchFamily="34" charset="0"/>
+                    <a:cs typeface="Arial" panose="020B0604020202020204" pitchFamily="34" charset="0"/>
+                  </a:rPr>
+                  <a:t>) y </a:t>
+                </a:r>
+                <a:r>
+                  <a:rPr lang="en-US" sz="1200" dirty="0" err="1">
+                    <a:latin typeface="Arial" panose="020B0604020202020204" pitchFamily="34" charset="0"/>
+                    <a:cs typeface="Arial" panose="020B0604020202020204" pitchFamily="34" charset="0"/>
+                  </a:rPr>
+                  <a:t>dividiendo</a:t>
+                </a:r>
+                <a:r>
+                  <a:rPr lang="en-US" sz="1200" dirty="0">
+                    <a:latin typeface="Arial" panose="020B0604020202020204" pitchFamily="34" charset="0"/>
+                    <a:cs typeface="Arial" panose="020B0604020202020204" pitchFamily="34" charset="0"/>
+                  </a:rPr>
+                  <a:t> la </a:t>
+                </a:r>
+                <a:r>
+                  <a:rPr lang="en-US" sz="1200" dirty="0" err="1">
+                    <a:latin typeface="Arial" panose="020B0604020202020204" pitchFamily="34" charset="0"/>
+                    <a:cs typeface="Arial" panose="020B0604020202020204" pitchFamily="34" charset="0"/>
+                  </a:rPr>
+                  <a:t>mitad</a:t>
+                </a:r>
+                <a:r>
+                  <a:rPr lang="en-US" sz="1200" dirty="0">
+                    <a:latin typeface="Arial" panose="020B0604020202020204" pitchFamily="34" charset="0"/>
+                    <a:cs typeface="Arial" panose="020B0604020202020204" pitchFamily="34" charset="0"/>
+                  </a:rPr>
+                  <a:t> de la </a:t>
+                </a:r>
+                <a:r>
+                  <a:rPr lang="en-US" sz="1200" dirty="0" err="1">
+                    <a:latin typeface="Arial" panose="020B0604020202020204" pitchFamily="34" charset="0"/>
+                    <a:cs typeface="Arial" panose="020B0604020202020204" pitchFamily="34" charset="0"/>
+                  </a:rPr>
+                  <a:t>longitud</a:t>
+                </a:r>
+                <a:r>
+                  <a:rPr lang="en-US" sz="1200" dirty="0">
+                    <a:latin typeface="Arial" panose="020B0604020202020204" pitchFamily="34" charset="0"/>
+                    <a:cs typeface="Arial" panose="020B0604020202020204" pitchFamily="34" charset="0"/>
+                  </a:rPr>
+                  <a:t> de </a:t>
+                </a:r>
+                <a:r>
+                  <a:rPr lang="en-US" sz="1200" dirty="0" err="1">
+                    <a:latin typeface="Arial" panose="020B0604020202020204" pitchFamily="34" charset="0"/>
+                    <a:cs typeface="Arial" panose="020B0604020202020204" pitchFamily="34" charset="0"/>
+                  </a:rPr>
+                  <a:t>onda</a:t>
+                </a:r>
+                <a:r>
+                  <a:rPr lang="en-US" sz="1200" dirty="0">
+                    <a:latin typeface="Arial" panose="020B0604020202020204" pitchFamily="34" charset="0"/>
+                    <a:cs typeface="Arial" panose="020B0604020202020204" pitchFamily="34" charset="0"/>
+                  </a:rPr>
+                  <a:t> central entre la </a:t>
+                </a:r>
+                <a:r>
+                  <a:rPr lang="en-US" sz="1200" dirty="0" err="1">
+                    <a:latin typeface="Arial" panose="020B0604020202020204" pitchFamily="34" charset="0"/>
+                    <a:cs typeface="Arial" panose="020B0604020202020204" pitchFamily="34" charset="0"/>
+                  </a:rPr>
+                  <a:t>diferencia</a:t>
+                </a:r>
+                <a:r>
+                  <a:rPr lang="en-US" sz="1200" dirty="0">
+                    <a:latin typeface="Arial" panose="020B0604020202020204" pitchFamily="34" charset="0"/>
+                    <a:cs typeface="Arial" panose="020B0604020202020204" pitchFamily="34" charset="0"/>
+                  </a:rPr>
+                  <a:t> de </a:t>
+                </a:r>
+                <a:r>
+                  <a:rPr lang="en-US" sz="1200" dirty="0" err="1">
+                    <a:latin typeface="Arial" panose="020B0604020202020204" pitchFamily="34" charset="0"/>
+                    <a:cs typeface="Arial" panose="020B0604020202020204" pitchFamily="34" charset="0"/>
+                  </a:rPr>
+                  <a:t>estos</a:t>
+                </a:r>
+                <a:r>
+                  <a:rPr lang="en-US" sz="1200" dirty="0">
+                    <a:latin typeface="Arial" panose="020B0604020202020204" pitchFamily="34" charset="0"/>
+                    <a:cs typeface="Arial" panose="020B0604020202020204" pitchFamily="34" charset="0"/>
+                  </a:rPr>
+                  <a:t> </a:t>
+                </a:r>
+                <a:r>
+                  <a:rPr lang="en-US" sz="1200" dirty="0" err="1">
+                    <a:latin typeface="Arial" panose="020B0604020202020204" pitchFamily="34" charset="0"/>
+                    <a:cs typeface="Arial" panose="020B0604020202020204" pitchFamily="34" charset="0"/>
+                  </a:rPr>
+                  <a:t>índices</a:t>
+                </a:r>
+                <a:r>
+                  <a:rPr lang="en-US" sz="1200" dirty="0">
+                    <a:latin typeface="Arial" panose="020B0604020202020204" pitchFamily="34" charset="0"/>
+                    <a:cs typeface="Arial" panose="020B0604020202020204" pitchFamily="34" charset="0"/>
+                  </a:rPr>
+                  <a:t> </a:t>
+                </a:r>
+                <a:r>
+                  <a:rPr lang="en-US" sz="1200" dirty="0" err="1">
+                    <a:latin typeface="Arial" panose="020B0604020202020204" pitchFamily="34" charset="0"/>
+                    <a:cs typeface="Arial" panose="020B0604020202020204" pitchFamily="34" charset="0"/>
+                  </a:rPr>
+                  <a:t>efectivos</a:t>
+                </a:r>
+                <a:r>
+                  <a:rPr lang="en-US" sz="1200" dirty="0">
+                    <a:latin typeface="Arial" panose="020B0604020202020204" pitchFamily="34" charset="0"/>
+                    <a:cs typeface="Arial" panose="020B0604020202020204" pitchFamily="34" charset="0"/>
+                  </a:rPr>
+                  <a:t>. Como </a:t>
+                </a:r>
+                <a:r>
+                  <a:rPr lang="en-US" sz="1200" dirty="0" err="1">
+                    <a:latin typeface="Arial" panose="020B0604020202020204" pitchFamily="34" charset="0"/>
+                    <a:cs typeface="Arial" panose="020B0604020202020204" pitchFamily="34" charset="0"/>
+                  </a:rPr>
+                  <a:t>resultado</a:t>
+                </a:r>
+                <a:r>
+                  <a:rPr lang="en-US" sz="1200" dirty="0">
+                    <a:latin typeface="Arial" panose="020B0604020202020204" pitchFamily="34" charset="0"/>
+                    <a:cs typeface="Arial" panose="020B0604020202020204" pitchFamily="34" charset="0"/>
+                  </a:rPr>
+                  <a:t> se </a:t>
+                </a:r>
+                <a:r>
+                  <a:rPr lang="en-US" sz="1200" dirty="0" err="1">
+                    <a:latin typeface="Arial" panose="020B0604020202020204" pitchFamily="34" charset="0"/>
+                    <a:cs typeface="Arial" panose="020B0604020202020204" pitchFamily="34" charset="0"/>
+                  </a:rPr>
+                  <a:t>obtiene</a:t>
+                </a:r>
+                <a:r>
+                  <a:rPr lang="en-US" sz="1200" dirty="0">
+                    <a:latin typeface="Arial" panose="020B0604020202020204" pitchFamily="34" charset="0"/>
+                    <a:cs typeface="Arial" panose="020B0604020202020204" pitchFamily="34" charset="0"/>
+                  </a:rPr>
+                  <a:t> un valor de </a:t>
+                </a:r>
+                <a14:m>
+                  <m:oMath xmlns:m="http://schemas.openxmlformats.org/officeDocument/2006/math">
+                    <m:sSub>
+                      <m:sSubPr>
+                        <m:ctrlPr>
+                          <a:rPr lang="es-ES" sz="1200" i="1">
+                            <a:latin typeface="Cambria Math" panose="02040503050406030204" pitchFamily="18" charset="0"/>
+                          </a:rPr>
+                        </m:ctrlPr>
+                      </m:sSubPr>
+                      <m:e>
+                        <m:r>
+                          <a:rPr lang="es-ES" sz="1200" i="1">
+                            <a:latin typeface="Cambria Math" panose="02040503050406030204" pitchFamily="18" charset="0"/>
+                          </a:rPr>
+                          <m:t>𝐿</m:t>
+                        </m:r>
+                      </m:e>
+                      <m:sub>
+                        <m:r>
+                          <a:rPr lang="es-ES" sz="1200" i="1">
+                            <a:latin typeface="Cambria Math" panose="02040503050406030204" pitchFamily="18" charset="0"/>
+                          </a:rPr>
+                          <m:t>𝜋</m:t>
+                        </m:r>
+                      </m:sub>
+                    </m:sSub>
+                    <m:r>
+                      <a:rPr lang="es-ES" sz="1200" b="0" i="1" smtClean="0">
+                        <a:latin typeface="Cambria Math" panose="02040503050406030204" pitchFamily="18" charset="0"/>
+                      </a:rPr>
+                      <m:t>=212.41</m:t>
+                    </m:r>
+                    <m:r>
+                      <m:rPr>
+                        <m:nor/>
+                      </m:rPr>
+                      <a:rPr lang="en-US" sz="1200" dirty="0"/>
+                      <m:t>µ</m:t>
+                    </m:r>
+                    <m:r>
+                      <m:rPr>
+                        <m:nor/>
+                      </m:rPr>
+                      <a:rPr lang="en-US" sz="1200" dirty="0"/>
+                      <m:t>m</m:t>
+                    </m:r>
+                  </m:oMath>
+                </a14:m>
+                <a:r>
+                  <a:rPr lang="en-US" sz="1200" dirty="0">
+                    <a:latin typeface="Arial" panose="020B0604020202020204" pitchFamily="34" charset="0"/>
+                    <a:cs typeface="Arial" panose="020B0604020202020204" pitchFamily="34" charset="0"/>
+                  </a:rPr>
+                  <a:t>.</a:t>
+                </a:r>
+              </a:p>
+              <a:p>
+                <a:pPr algn="just"/>
+                <a:endParaRPr lang="en-US" sz="1200" dirty="0">
+                  <a:latin typeface="Arial" panose="020B0604020202020204" pitchFamily="34" charset="0"/>
+                  <a:cs typeface="Arial" panose="020B0604020202020204" pitchFamily="34" charset="0"/>
+                </a:endParaRPr>
+              </a:p>
+              <a:p>
+                <a:pPr algn="just"/>
+                <a:endParaRPr lang="en-US" sz="1200" dirty="0">
+                  <a:latin typeface="Arial" panose="020B0604020202020204" pitchFamily="34" charset="0"/>
+                  <a:cs typeface="Arial" panose="020B0604020202020204" pitchFamily="34" charset="0"/>
+                </a:endParaRPr>
+              </a:p>
+              <a:p>
+                <a:pPr algn="just"/>
+                <a:endParaRPr lang="en-US" sz="1200" dirty="0">
+                  <a:latin typeface="Arial" panose="020B0604020202020204" pitchFamily="34" charset="0"/>
+                  <a:cs typeface="Arial" panose="020B0604020202020204" pitchFamily="34" charset="0"/>
+                </a:endParaRPr>
+              </a:p>
+              <a:p>
+                <a:pPr algn="just"/>
+                <a:endParaRPr lang="en-US" sz="1200" dirty="0">
+                  <a:latin typeface="Arial" panose="020B0604020202020204" pitchFamily="34" charset="0"/>
+                  <a:cs typeface="Arial" panose="020B0604020202020204" pitchFamily="34" charset="0"/>
+                </a:endParaRPr>
+              </a:p>
+              <a:p>
+                <a:pPr algn="just"/>
+                <a:endParaRPr lang="en-US" sz="1200" dirty="0">
+                  <a:latin typeface="Arial" panose="020B0604020202020204" pitchFamily="34" charset="0"/>
+                  <a:cs typeface="Arial" panose="020B0604020202020204" pitchFamily="34" charset="0"/>
+                </a:endParaRPr>
+              </a:p>
+              <a:p>
+                <a:pPr algn="just"/>
+                <a:endParaRPr lang="en-US" sz="1200" dirty="0">
+                  <a:latin typeface="Arial" panose="020B0604020202020204" pitchFamily="34" charset="0"/>
+                  <a:cs typeface="Arial" panose="020B0604020202020204" pitchFamily="34" charset="0"/>
+                </a:endParaRPr>
+              </a:p>
+              <a:p>
+                <a:pPr algn="just"/>
+                <a:endParaRPr lang="en-US" sz="1200" dirty="0">
+                  <a:latin typeface="Arial" panose="020B0604020202020204" pitchFamily="34" charset="0"/>
+                  <a:cs typeface="Arial" panose="020B0604020202020204" pitchFamily="34" charset="0"/>
+                </a:endParaRPr>
+              </a:p>
+              <a:p>
+                <a:pPr algn="just"/>
+                <a:endParaRPr lang="en-US" sz="1200" dirty="0">
+                  <a:latin typeface="Arial" panose="020B0604020202020204" pitchFamily="34" charset="0"/>
+                  <a:cs typeface="Arial" panose="020B0604020202020204" pitchFamily="34" charset="0"/>
+                </a:endParaRPr>
+              </a:p>
+              <a:p>
+                <a:pPr algn="just"/>
+                <a:endParaRPr lang="en-US" sz="1200" dirty="0">
+                  <a:latin typeface="Arial" panose="020B0604020202020204" pitchFamily="34" charset="0"/>
+                  <a:cs typeface="Arial" panose="020B0604020202020204" pitchFamily="34" charset="0"/>
+                </a:endParaRPr>
+              </a:p>
+            </p:txBody>
+          </p:sp>
+        </mc:Choice>
+        <mc:Fallback>
+          <p:sp>
+            <p:nvSpPr>
+              <p:cNvPr id="2" name="CuadroTexto 1">
+                <a:extLst>
+                  <a:ext uri="{FF2B5EF4-FFF2-40B4-BE49-F238E27FC236}">
+                    <a16:creationId xmlns:a16="http://schemas.microsoft.com/office/drawing/2014/main" id="{FDE3A197-9508-F9F1-1FEB-FF883D78C151}"/>
+                  </a:ext>
+                </a:extLst>
+              </p:cNvPr>
+              <p:cNvSpPr txBox="1">
+                <a:spLocks noRot="1" noChangeAspect="1" noMove="1" noResize="1" noEditPoints="1" noAdjustHandles="1" noChangeArrowheads="1" noChangeShapeType="1" noTextEdit="1"/>
+              </p:cNvSpPr>
+              <p:nvPr/>
+            </p:nvSpPr>
+            <p:spPr>
+              <a:xfrm>
+                <a:off x="518056" y="3774468"/>
+                <a:ext cx="11199971" cy="2492990"/>
+              </a:xfrm>
+              <a:prstGeom prst="rect">
+                <a:avLst/>
+              </a:prstGeom>
+              <a:blipFill>
+                <a:blip r:embed="rId6"/>
+                <a:stretch>
+                  <a:fillRect/>
+                </a:stretch>
+              </a:blipFill>
+              <a:ln w="28575">
+                <a:solidFill>
+                  <a:srgbClr val="E0700D"/>
+                </a:solidFill>
+              </a:ln>
+            </p:spPr>
+            <p:txBody>
+              <a:bodyPr/>
+              <a:lstStyle/>
+              <a:p>
+                <a:r>
+                  <a:rPr lang="es-ES">
+                    <a:noFill/>
+                  </a:rPr>
+                  <a:t> </a:t>
+                </a:r>
+              </a:p>
+            </p:txBody>
+          </p:sp>
+        </mc:Fallback>
+      </mc:AlternateContent>
+      <p:pic>
+        <p:nvPicPr>
+          <p:cNvPr id="6" name="Imagen 5">
             <a:extLst>
               <a:ext uri="{FF2B5EF4-FFF2-40B4-BE49-F238E27FC236}">
-                <a16:creationId xmlns:a16="http://schemas.microsoft.com/office/drawing/2014/main" id="{FDE3A197-9508-F9F1-1FEB-FF883D78C151}"/>
+                <a16:creationId xmlns:a16="http://schemas.microsoft.com/office/drawing/2014/main" id="{BA205516-F93B-4FBA-BA73-0A5A8624223C}"/>
               </a:ext>
             </a:extLst>
           </p:cNvPr>
-          <p:cNvSpPr txBox="1"/>
+          <p:cNvPicPr>
+            <a:picLocks noChangeAspect="1"/>
+          </p:cNvPicPr>
           <p:nvPr/>
-        </p:nvSpPr>
+        </p:nvPicPr>
+        <p:blipFill>
+          <a:blip r:embed="rId7"/>
+          <a:stretch>
+            <a:fillRect/>
+          </a:stretch>
+        </p:blipFill>
         <p:spPr>
           <a:xfrm>
-            <a:off x="609441" y="4860334"/>
-            <a:ext cx="11199971" cy="1200329"/>
+            <a:off x="3406860" y="4724400"/>
+            <a:ext cx="4876800" cy="1239993"/>
           </a:xfrm>
           <a:prstGeom prst="rect">
             <a:avLst/>
           </a:prstGeom>
-          <a:solidFill>
-            <a:schemeClr val="bg1">
-              <a:lumMod val="95000"/>
-            </a:schemeClr>
-          </a:solidFill>
-          <a:ln w="28575">
-            <a:solidFill>
-              <a:srgbClr val="E0700D"/>
-            </a:solidFill>
-          </a:ln>
         </p:spPr>
-        <p:txBody>
-          <a:bodyPr wrap="square" rtlCol="0">
-            <a:spAutoFit/>
-          </a:bodyPr>
-          <a:lstStyle/>
-          <a:p>
-            <a:pPr algn="just"/>
-            <a:r>
-              <a:rPr lang="en-US" sz="1200" dirty="0">
-                <a:latin typeface="Arial" panose="020B0604020202020204" pitchFamily="34" charset="0"/>
-                <a:cs typeface="Arial" panose="020B0604020202020204" pitchFamily="34" charset="0"/>
-              </a:rPr>
-              <a:t>Document all your results (neff, plot fields of different modes, comparison between different polarizations…)</a:t>
-            </a:r>
-          </a:p>
-          <a:p>
-            <a:pPr algn="just"/>
-            <a:endParaRPr lang="en-US" sz="1200" dirty="0">
-              <a:latin typeface="Arial" panose="020B0604020202020204" pitchFamily="34" charset="0"/>
-              <a:cs typeface="Arial" panose="020B0604020202020204" pitchFamily="34" charset="0"/>
-            </a:endParaRPr>
-          </a:p>
-          <a:p>
-            <a:pPr algn="just"/>
-            <a:endParaRPr lang="en-US" sz="1200" dirty="0">
-              <a:latin typeface="Arial" panose="020B0604020202020204" pitchFamily="34" charset="0"/>
-              <a:cs typeface="Arial" panose="020B0604020202020204" pitchFamily="34" charset="0"/>
-            </a:endParaRPr>
-          </a:p>
-          <a:p>
-            <a:pPr algn="just"/>
-            <a:endParaRPr lang="en-US" sz="1200" dirty="0">
-              <a:latin typeface="Arial" panose="020B0604020202020204" pitchFamily="34" charset="0"/>
-              <a:cs typeface="Arial" panose="020B0604020202020204" pitchFamily="34" charset="0"/>
-            </a:endParaRPr>
-          </a:p>
-          <a:p>
-            <a:pPr algn="just"/>
-            <a:endParaRPr lang="en-US" sz="1200" dirty="0">
-              <a:latin typeface="Arial" panose="020B0604020202020204" pitchFamily="34" charset="0"/>
-              <a:cs typeface="Arial" panose="020B0604020202020204" pitchFamily="34" charset="0"/>
-            </a:endParaRPr>
-          </a:p>
-          <a:p>
-            <a:pPr algn="just"/>
-            <a:endParaRPr lang="en-US" sz="1200" dirty="0">
-              <a:latin typeface="Arial" panose="020B0604020202020204" pitchFamily="34" charset="0"/>
-              <a:cs typeface="Arial" panose="020B0604020202020204" pitchFamily="34" charset="0"/>
-            </a:endParaRPr>
-          </a:p>
-        </p:txBody>
-      </p:sp>
+      </p:pic>
     </p:spTree>
     <p:extLst>
       <p:ext uri="{BB962C8B-B14F-4D97-AF65-F5344CB8AC3E}">
@@ -7127,100 +8183,240 @@
       </p:grpSpPr>
       <p:sp>
         <p:nvSpPr>
-          <p:cNvPr id="3" name="object 3"/>
-          <p:cNvSpPr/>
-          <p:nvPr/>
-        </p:nvSpPr>
-        <p:spPr>
-          <a:xfrm>
-            <a:off x="3945635" y="2636520"/>
-            <a:ext cx="8246363" cy="1584959"/>
-          </a:xfrm>
-          <a:prstGeom prst="rect">
-            <a:avLst/>
-          </a:prstGeom>
-          <a:blipFill>
-            <a:blip r:embed="rId2" cstate="print"/>
-            <a:stretch>
-              <a:fillRect/>
-            </a:stretch>
-          </a:blipFill>
-        </p:spPr>
-        <p:txBody>
-          <a:bodyPr wrap="square" lIns="0" tIns="0" rIns="0" bIns="0" rtlCol="0"/>
-          <a:lstStyle/>
-          <a:p>
-            <a:endParaRPr/>
-          </a:p>
-        </p:txBody>
-      </p:sp>
-      <p:sp>
-        <p:nvSpPr>
-          <p:cNvPr id="4" name="object 4"/>
-          <p:cNvSpPr txBox="1">
+          <p:cNvPr id="3" name="Marcador de texto 2">
+            <a:extLst>
+              <a:ext uri="{FF2B5EF4-FFF2-40B4-BE49-F238E27FC236}">
+                <a16:creationId xmlns:a16="http://schemas.microsoft.com/office/drawing/2014/main" id="{CBD5F6C9-C94E-4972-A435-0A8F21321D59}"/>
+              </a:ext>
+            </a:extLst>
+          </p:cNvPr>
+          <p:cNvSpPr>
             <a:spLocks noGrp="1"/>
           </p:cNvSpPr>
           <p:nvPr>
-            <p:ph type="title"/>
+            <p:ph type="body" idx="1"/>
           </p:nvPr>
         </p:nvSpPr>
         <p:spPr>
           <a:xfrm>
-            <a:off x="4513326" y="3165729"/>
-            <a:ext cx="2233295" cy="513715"/>
+            <a:off x="609600" y="762000"/>
+            <a:ext cx="10972800" cy="5539978"/>
           </a:xfrm>
-          <a:prstGeom prst="rect">
-            <a:avLst/>
-          </a:prstGeom>
         </p:spPr>
         <p:txBody>
-          <a:bodyPr vert="horz" wrap="square" lIns="0" tIns="13335" rIns="0" bIns="0" rtlCol="0">
-            <a:spAutoFit/>
-          </a:bodyPr>
+          <a:bodyPr/>
           <a:lstStyle/>
           <a:p>
+            <a:r>
+              <a:rPr lang="es-ES" sz="1200" dirty="0"/>
+              <a:t>Índices efectivos para los 30 primeros modos:</a:t>
+            </a:r>
+          </a:p>
+          <a:p>
+            <a:r>
+              <a:rPr lang="es-ES" sz="1200" dirty="0"/>
+              <a:t>array([1.6786595 +7.78934672e-05j, 1.67512732+7.81571827e-05j,</a:t>
+            </a:r>
+          </a:p>
+          <a:p>
+            <a:r>
+              <a:rPr lang="es-ES" sz="1200" dirty="0"/>
+              <a:t>       1.66922847+7.86028340e-05j, 1.66094525+7.92401466e-05j,</a:t>
+            </a:r>
+          </a:p>
+          <a:p>
+            <a:r>
+              <a:rPr lang="es-ES" sz="1200" dirty="0"/>
+              <a:t>       1.65025312+8.00839409e-05j, 1.63712124+8.11557006e-05j,</a:t>
+            </a:r>
+          </a:p>
+          <a:p>
+            <a:r>
+              <a:rPr lang="es-ES" sz="1200" dirty="0"/>
+              <a:t>       1.6215135 +8.24863265e-05j, 1.60339058+8.41212350e-05j,</a:t>
+            </a:r>
+          </a:p>
+          <a:p>
+            <a:r>
+              <a:rPr lang="es-ES" sz="1200" dirty="0"/>
+              <a:t>       1.58271457+8.61311110e-05j, 1.5774205 +1.66068730e-04j,</a:t>
+            </a:r>
+          </a:p>
+          <a:p>
+            <a:r>
+              <a:rPr lang="es-ES" sz="1200" dirty="0"/>
+              <a:t>       1.57388942+1.66498915e-04j, 1.56799588+1.67223410e-04j,</a:t>
+            </a:r>
+          </a:p>
+          <a:p>
+            <a:r>
+              <a:rPr lang="es-ES" sz="1200" dirty="0"/>
+              <a:t>       1.55972723+1.68258132e-04j, 1.5594584 +8.86366882e-05j,</a:t>
+            </a:r>
+          </a:p>
+          <a:p>
+            <a:r>
+              <a:rPr lang="es-ES" sz="1200" dirty="0"/>
+              <a:t>       1.54906903+1.69617736e-04j, 1.53601168+1.71243999e-04j,</a:t>
+            </a:r>
+          </a:p>
+          <a:p>
+            <a:r>
+              <a:rPr lang="es-ES" sz="1200" dirty="0"/>
+              <a:t>       1.53362692+9.19569892e-05j, 1.52054265+1.73463904e-04j,</a:t>
+            </a:r>
+          </a:p>
+          <a:p>
+            <a:r>
+              <a:rPr lang="es-ES" sz="1200" dirty="0"/>
+              <a:t>       1.5053405 +9.64082096e-05j, 1.50269423+1.76086968e-04j,</a:t>
+            </a:r>
+          </a:p>
+          <a:p>
+            <a:r>
+              <a:rPr lang="es-ES" sz="1200" dirty="0"/>
+              <a:t>       1.48257196+1.79388862e-04j, 1.4750929 +1.04662871e-04j,</a:t>
+            </a:r>
+          </a:p>
+          <a:p>
+            <a:r>
+              <a:rPr lang="es-ES" sz="1200" dirty="0"/>
+              <a:t>       1.46055739+1.83954929e-04j, 1.44602702+1.38735742e-04j,</a:t>
+            </a:r>
+          </a:p>
+          <a:p>
+            <a:r>
+              <a:rPr lang="es-ES" sz="1200" dirty="0"/>
+              <a:t>       1.44427255+2.13138695e-04j, 1.44154639+2.15937624e-04j,</a:t>
+            </a:r>
+          </a:p>
+          <a:p>
+            <a:r>
+              <a:rPr lang="es-ES" sz="1200" dirty="0"/>
+              <a:t>       1.43845554+1.93429161e-04j, 1.43685358+2.16442381e-04j,</a:t>
+            </a:r>
+          </a:p>
+          <a:p>
+            <a:r>
+              <a:rPr lang="es-ES" sz="1200" dirty="0"/>
+              <a:t>       1.43133766+1.97271657e-04j, 1.43033094+2.15440791e-04j])</a:t>
+            </a:r>
+          </a:p>
+          <a:p>
+            <a:endParaRPr lang="es-ES" sz="1200" dirty="0"/>
+          </a:p>
+          <a:p>
+            <a:r>
+              <a:rPr lang="es-ES" sz="1200" dirty="0"/>
+              <a:t>Si nos fijamos en la parte real, podemos observar que se propagan los 25 primeros modos menos el último, ya que este ve un índice efectivo menor al del </a:t>
+            </a:r>
+            <a:r>
+              <a:rPr lang="es-ES" sz="1200" dirty="0" err="1"/>
+              <a:t>cladding</a:t>
+            </a:r>
+            <a:r>
+              <a:rPr lang="es-ES" sz="1200" dirty="0"/>
+              <a:t> (1.44).</a:t>
+            </a:r>
+          </a:p>
+          <a:p>
+            <a:endParaRPr lang="es-ES" sz="1200" dirty="0"/>
+          </a:p>
+          <a:p>
+            <a:r>
+              <a:rPr lang="es-ES" sz="1200" dirty="0"/>
+              <a:t>Análisis del porcentaje de TE de cada modo:</a:t>
+            </a:r>
+          </a:p>
+          <a:p>
+            <a:r>
+              <a:rPr lang="en-US" sz="1200" dirty="0"/>
+              <a:t>array([9.99991904e-01, 9.99967183e-01, 9.99924497e-01, 9.99861445e-01,</a:t>
+            </a:r>
+          </a:p>
+          <a:p>
+            <a:r>
+              <a:rPr lang="en-US" sz="1200" dirty="0"/>
+              <a:t>       9.99774272e-01, 9.99657368e-01, 9.99502382e-01, 9.99296461e-01,</a:t>
+            </a:r>
+          </a:p>
+          <a:p>
+            <a:r>
+              <a:rPr lang="en-US" sz="1200" dirty="0"/>
+              <a:t>       9.99013009e-01, 2.38565216e-04, 9.55099424e-04, 2.13831793e-03,</a:t>
+            </a:r>
+          </a:p>
+          <a:p>
+            <a:r>
+              <a:rPr lang="en-US" sz="1200" dirty="0"/>
+              <a:t>       3.73633926e-03, 9.98594348e-01, 5.78997522e-03, 9.32192911e-03,</a:t>
+            </a:r>
+          </a:p>
+          <a:p>
+            <a:r>
+              <a:rPr lang="en-US" sz="1200" dirty="0"/>
+              <a:t>       9.96954269e-01, 1.09103635e-02, 9.97247761e-01, 1.38536944e-02,</a:t>
+            </a:r>
+          </a:p>
+          <a:p>
+            <a:r>
+              <a:rPr lang="en-US" sz="1200" dirty="0"/>
+              <a:t>       1.69467184e-02, 9.95776123e-01, 1.98944330e-02, 9.71035840e-01,</a:t>
+            </a:r>
+          </a:p>
+          <a:p>
+            <a:r>
+              <a:rPr lang="en-US" sz="1200" dirty="0"/>
+              <a:t>       5.87218497e-02, 2.41834581e-03, 2.08842314e-02, 1.51438309e-02,</a:t>
+            </a:r>
+          </a:p>
+          <a:p>
+            <a:r>
+              <a:rPr lang="en-US" sz="1200" dirty="0"/>
+              <a:t>       8.39470852e-01, 1.90596366e-01])</a:t>
+            </a:r>
+          </a:p>
+          <a:p>
+            <a:endParaRPr lang="en-US" sz="1200" dirty="0"/>
+          </a:p>
+          <a:p>
+            <a:r>
+              <a:rPr lang="es-ES" sz="1200" dirty="0"/>
+              <a:t>Podemos observar que los modos que serán más TE son el 1-9,14,17, 19, 22, 24 y 29, mientras que el resto tendrán mayor componente TM.</a:t>
+            </a:r>
+          </a:p>
+        </p:txBody>
+      </p:sp>
+      <p:sp>
+        <p:nvSpPr>
+          <p:cNvPr id="4" name="Marcador de pie de página 3">
+            <a:extLst>
+              <a:ext uri="{FF2B5EF4-FFF2-40B4-BE49-F238E27FC236}">
+                <a16:creationId xmlns:a16="http://schemas.microsoft.com/office/drawing/2014/main" id="{E0CD65A1-9D4A-4D1C-AFBB-431764CDB3F0}"/>
+              </a:ext>
+            </a:extLst>
+          </p:cNvPr>
+          <p:cNvSpPr>
+            <a:spLocks noGrp="1"/>
+          </p:cNvSpPr>
+          <p:nvPr>
+            <p:ph type="ftr" sz="quarter" idx="5"/>
+          </p:nvPr>
+        </p:nvSpPr>
+        <p:spPr/>
+        <p:txBody>
+          <a:bodyPr/>
+          <a:lstStyle/>
+          <a:p>
             <a:pPr marL="12700">
-              <a:lnSpc>
-                <a:spcPct val="100000"/>
-              </a:lnSpc>
               <a:spcBef>
-                <a:spcPts val="105"/>
+                <a:spcPts val="15"/>
               </a:spcBef>
             </a:pPr>
             <a:r>
-              <a:rPr sz="3200" b="1" spc="-5" dirty="0">
-                <a:solidFill>
-                  <a:srgbClr val="FFFFFF"/>
-                </a:solidFill>
-                <a:latin typeface="Lucida Sans"/>
-                <a:cs typeface="Lucida Sans"/>
-              </a:rPr>
-              <a:t>Thank</a:t>
-            </a:r>
-            <a:r>
-              <a:rPr sz="3200" b="1" spc="-55" dirty="0">
-                <a:solidFill>
-                  <a:srgbClr val="FFFFFF"/>
-                </a:solidFill>
-                <a:latin typeface="Lucida Sans"/>
-                <a:cs typeface="Lucida Sans"/>
-              </a:rPr>
-              <a:t> </a:t>
-            </a:r>
-            <a:r>
-              <a:rPr sz="3200" b="1" dirty="0">
-                <a:solidFill>
-                  <a:srgbClr val="FFFFFF"/>
-                </a:solidFill>
-                <a:latin typeface="Lucida Sans"/>
-                <a:cs typeface="Lucida Sans"/>
-              </a:rPr>
-              <a:t>you</a:t>
-            </a:r>
-            <a:endParaRPr sz="3200">
-              <a:latin typeface="Lucida Sans"/>
-              <a:cs typeface="Lucida Sans"/>
-            </a:endParaRPr>
+              <a:rPr lang="es-ES" spc="-5" dirty="0"/>
+              <a:t>LAB 0.2. COUPLERS</a:t>
+            </a:r>
           </a:p>
         </p:txBody>
       </p:sp>
@@ -7229,7 +8425,7 @@
           <p:cNvPr id="5" name="Marcador de número de diapositiva 4">
             <a:extLst>
               <a:ext uri="{FF2B5EF4-FFF2-40B4-BE49-F238E27FC236}">
-                <a16:creationId xmlns:a16="http://schemas.microsoft.com/office/drawing/2014/main" id="{B052DA19-AD24-7D24-2AE9-51F8F5A7F5E0}"/>
+                <a16:creationId xmlns:a16="http://schemas.microsoft.com/office/drawing/2014/main" id="{8FE1C107-890A-49C8-B1C9-17571AEBDB76}"/>
               </a:ext>
             </a:extLst>
           </p:cNvPr>
@@ -7249,11 +8445,66 @@
               <a:rPr lang="es-ES" smtClean="0"/>
               <a:t>8</a:t>
             </a:fld>
-            <a:endParaRPr lang="es-ES"/>
+            <a:endParaRPr lang="es-ES" dirty="0"/>
+          </a:p>
+        </p:txBody>
+      </p:sp>
+      <p:sp>
+        <p:nvSpPr>
+          <p:cNvPr id="19" name="object 16">
+            <a:extLst>
+              <a:ext uri="{FF2B5EF4-FFF2-40B4-BE49-F238E27FC236}">
+                <a16:creationId xmlns:a16="http://schemas.microsoft.com/office/drawing/2014/main" id="{8AFCDEA1-211D-4C75-AC9E-88A4F8E1B393}"/>
+              </a:ext>
+            </a:extLst>
+          </p:cNvPr>
+          <p:cNvSpPr txBox="1">
+            <a:spLocks noGrp="1"/>
+          </p:cNvSpPr>
+          <p:nvPr>
+            <p:ph type="title"/>
+          </p:nvPr>
+        </p:nvSpPr>
+        <p:spPr>
+          <a:xfrm>
+            <a:off x="590550" y="206375"/>
+            <a:ext cx="10991850" cy="397545"/>
+          </a:xfrm>
+          <a:prstGeom prst="rect">
+            <a:avLst/>
+          </a:prstGeom>
+        </p:spPr>
+        <p:txBody>
+          <a:bodyPr vert="horz" wrap="square" lIns="0" tIns="12700" rIns="0" bIns="0" rtlCol="0">
+            <a:spAutoFit/>
+          </a:bodyPr>
+          <a:lstStyle/>
+          <a:p>
+            <a:pPr marL="12700">
+              <a:lnSpc>
+                <a:spcPct val="100000"/>
+              </a:lnSpc>
+              <a:spcBef>
+                <a:spcPts val="100"/>
+              </a:spcBef>
+            </a:pPr>
+            <a:r>
+              <a:rPr lang="en-US" sz="2500" dirty="0"/>
+              <a:t>Learning outcome #2 – Multimode Interference (MMI) Coupler cross-section</a:t>
+            </a:r>
+            <a:endParaRPr sz="2500" b="0" dirty="0">
+              <a:latin typeface="+mj-lt"/>
+              <a:cs typeface="Lucida Sans"/>
+            </a:endParaRPr>
           </a:p>
         </p:txBody>
       </p:sp>
     </p:spTree>
+    <p:extLst>
+      <p:ext uri="{BB962C8B-B14F-4D97-AF65-F5344CB8AC3E}">
+        <p14:creationId xmlns:p14="http://schemas.microsoft.com/office/powerpoint/2010/main" val="797097892"/>
+      </p:ext>
+    </p:extLst>
   </p:cSld>
   <p:clrMapOvr>
     <a:masterClrMapping/>
@@ -7283,7 +8534,7 @@
           <p:cNvPr id="2" name="Título 1">
             <a:extLst>
               <a:ext uri="{FF2B5EF4-FFF2-40B4-BE49-F238E27FC236}">
-                <a16:creationId xmlns:a16="http://schemas.microsoft.com/office/drawing/2014/main" id="{E7142EF5-74F6-4935-9D72-DB4F48743FFA}"/>
+                <a16:creationId xmlns:a16="http://schemas.microsoft.com/office/drawing/2014/main" id="{4AA83EB4-B2EA-4E80-9DCF-ABFDDEEC0ACD}"/>
               </a:ext>
             </a:extLst>
           </p:cNvPr>
@@ -7294,12 +8545,21 @@
             <p:ph type="title"/>
           </p:nvPr>
         </p:nvSpPr>
-        <p:spPr/>
+        <p:spPr>
+          <a:xfrm>
+            <a:off x="590550" y="206752"/>
+            <a:ext cx="10991850" cy="384721"/>
+          </a:xfrm>
+        </p:spPr>
         <p:txBody>
           <a:bodyPr/>
           <a:lstStyle/>
           <a:p>
-            <a:endParaRPr lang="es-ES"/>
+            <a:r>
+              <a:rPr lang="en-US" sz="2500" dirty="0"/>
+              <a:t>Learning outcome #2 – Multimode Interference (MMI) Coupler cross-section</a:t>
+            </a:r>
+            <a:endParaRPr lang="es-ES" sz="2500" dirty="0"/>
           </a:p>
         </p:txBody>
       </p:sp>
@@ -7308,7 +8568,7 @@
           <p:cNvPr id="3" name="Marcador de texto 2">
             <a:extLst>
               <a:ext uri="{FF2B5EF4-FFF2-40B4-BE49-F238E27FC236}">
-                <a16:creationId xmlns:a16="http://schemas.microsoft.com/office/drawing/2014/main" id="{92710A37-98E0-4CCF-8EF0-9D8D84970DD9}"/>
+                <a16:creationId xmlns:a16="http://schemas.microsoft.com/office/drawing/2014/main" id="{79BAC382-009F-41DF-9F8C-AF8D12408105}"/>
               </a:ext>
             </a:extLst>
           </p:cNvPr>
@@ -7321,8 +8581,8 @@
         </p:nvSpPr>
         <p:spPr>
           <a:xfrm>
-            <a:off x="609600" y="2152910"/>
-            <a:ext cx="10972800" cy="553998"/>
+            <a:off x="592667" y="4622039"/>
+            <a:ext cx="10972800" cy="923330"/>
           </a:xfrm>
         </p:spPr>
         <p:txBody>
@@ -7331,7 +8591,7 @@
           <a:p>
             <a:r>
               <a:rPr lang="es-ES" sz="1200" dirty="0"/>
-              <a:t>De pendiendo de la distancia  a la que se corta la longitud del MMI se va a tener una autoimagen determinada</a:t>
+              <a:t>Podemos observar cómo para diferentes longitudes en el MMI, se propaga un modo espacial distinto en su interior, es decir, cuanto mayor es el orden del modo, menor es su índice efectivo, tal como se explicó en las sesiones de laboratorio anteriores.</a:t>
             </a:r>
           </a:p>
           <a:p>
@@ -7340,13 +8600,8 @@
           <a:p>
             <a:r>
               <a:rPr lang="es-ES" sz="1200" dirty="0"/>
-              <a:t>Calcular …, …, </a:t>
-            </a:r>
-            <a:r>
-              <a:rPr lang="es-ES" sz="1200" dirty="0" err="1"/>
-              <a:t>L_pi</a:t>
-            </a:r>
-            <a:endParaRPr lang="es-ES" sz="1200" dirty="0"/>
+              <a:t>Se ha representado gráficamente los modos TE0, TE1 y  TE7. Sabemos que son estos modos debido a que la fracción TE es cercana a 1. Aunque los modos TM también se propagan, la forma espacial de la guía de onda se adapta mejor a los modos TE.</a:t>
+            </a:r>
           </a:p>
         </p:txBody>
       </p:sp>
@@ -7355,7 +8610,7 @@
           <p:cNvPr id="4" name="Marcador de pie de página 3">
             <a:extLst>
               <a:ext uri="{FF2B5EF4-FFF2-40B4-BE49-F238E27FC236}">
-                <a16:creationId xmlns:a16="http://schemas.microsoft.com/office/drawing/2014/main" id="{04DDB22E-DB66-41AA-A98E-87234657D449}"/>
+                <a16:creationId xmlns:a16="http://schemas.microsoft.com/office/drawing/2014/main" id="{C440943F-FAA5-4B0E-AA40-3B1B64D384C8}"/>
               </a:ext>
             </a:extLst>
           </p:cNvPr>
@@ -7389,7 +8644,7 @@
           <p:cNvPr id="5" name="Marcador de número de diapositiva 4">
             <a:extLst>
               <a:ext uri="{FF2B5EF4-FFF2-40B4-BE49-F238E27FC236}">
-                <a16:creationId xmlns:a16="http://schemas.microsoft.com/office/drawing/2014/main" id="{953D5AE1-CE5A-4543-9BE3-C8AA193522C0}"/>
+                <a16:creationId xmlns:a16="http://schemas.microsoft.com/office/drawing/2014/main" id="{7A22CBC6-9ED0-4C95-8F63-09518B5D9221}"/>
               </a:ext>
             </a:extLst>
           </p:cNvPr>
@@ -7413,10 +8668,213 @@
           </a:p>
         </p:txBody>
       </p:sp>
+      <p:pic>
+        <p:nvPicPr>
+          <p:cNvPr id="7" name="Imagen 6">
+            <a:extLst>
+              <a:ext uri="{FF2B5EF4-FFF2-40B4-BE49-F238E27FC236}">
+                <a16:creationId xmlns:a16="http://schemas.microsoft.com/office/drawing/2014/main" id="{6056C499-CB27-4CA8-B9A6-788BDC676FE0}"/>
+              </a:ext>
+            </a:extLst>
+          </p:cNvPr>
+          <p:cNvPicPr>
+            <a:picLocks noChangeAspect="1"/>
+          </p:cNvPicPr>
+          <p:nvPr/>
+        </p:nvPicPr>
+        <p:blipFill>
+          <a:blip r:embed="rId2"/>
+          <a:stretch>
+            <a:fillRect/>
+          </a:stretch>
+        </p:blipFill>
+        <p:spPr>
+          <a:xfrm>
+            <a:off x="973666" y="1958527"/>
+            <a:ext cx="3022595" cy="2157412"/>
+          </a:xfrm>
+          <a:prstGeom prst="rect">
+            <a:avLst/>
+          </a:prstGeom>
+        </p:spPr>
+      </p:pic>
+      <p:pic>
+        <p:nvPicPr>
+          <p:cNvPr id="9" name="Imagen 8">
+            <a:extLst>
+              <a:ext uri="{FF2B5EF4-FFF2-40B4-BE49-F238E27FC236}">
+                <a16:creationId xmlns:a16="http://schemas.microsoft.com/office/drawing/2014/main" id="{9FAF82E5-E9CF-4488-860A-07E88E759C62}"/>
+              </a:ext>
+            </a:extLst>
+          </p:cNvPr>
+          <p:cNvPicPr>
+            <a:picLocks noChangeAspect="1"/>
+          </p:cNvPicPr>
+          <p:nvPr/>
+        </p:nvPicPr>
+        <p:blipFill>
+          <a:blip r:embed="rId3"/>
+          <a:stretch>
+            <a:fillRect/>
+          </a:stretch>
+        </p:blipFill>
+        <p:spPr>
+          <a:xfrm>
+            <a:off x="4402667" y="1958527"/>
+            <a:ext cx="3083602" cy="2157412"/>
+          </a:xfrm>
+          <a:prstGeom prst="rect">
+            <a:avLst/>
+          </a:prstGeom>
+        </p:spPr>
+      </p:pic>
+      <p:pic>
+        <p:nvPicPr>
+          <p:cNvPr id="11" name="Imagen 10">
+            <a:extLst>
+              <a:ext uri="{FF2B5EF4-FFF2-40B4-BE49-F238E27FC236}">
+                <a16:creationId xmlns:a16="http://schemas.microsoft.com/office/drawing/2014/main" id="{497B5496-026D-47D6-BFF9-E04E6EAA33A9}"/>
+              </a:ext>
+            </a:extLst>
+          </p:cNvPr>
+          <p:cNvPicPr>
+            <a:picLocks noChangeAspect="1"/>
+          </p:cNvPicPr>
+          <p:nvPr/>
+        </p:nvPicPr>
+        <p:blipFill>
+          <a:blip r:embed="rId4"/>
+          <a:stretch>
+            <a:fillRect/>
+          </a:stretch>
+        </p:blipFill>
+        <p:spPr>
+          <a:xfrm>
+            <a:off x="7907867" y="1958527"/>
+            <a:ext cx="3083601" cy="2157412"/>
+          </a:xfrm>
+          <a:prstGeom prst="rect">
+            <a:avLst/>
+          </a:prstGeom>
+        </p:spPr>
+      </p:pic>
+      <p:sp>
+        <p:nvSpPr>
+          <p:cNvPr id="12" name="CuadroTexto 11">
+            <a:extLst>
+              <a:ext uri="{FF2B5EF4-FFF2-40B4-BE49-F238E27FC236}">
+                <a16:creationId xmlns:a16="http://schemas.microsoft.com/office/drawing/2014/main" id="{CC689859-3031-47CF-8C69-A59D7BA0119F}"/>
+              </a:ext>
+            </a:extLst>
+          </p:cNvPr>
+          <p:cNvSpPr txBox="1"/>
+          <p:nvPr/>
+        </p:nvSpPr>
+        <p:spPr>
+          <a:xfrm>
+            <a:off x="701671" y="1143000"/>
+            <a:ext cx="2862795" cy="461665"/>
+          </a:xfrm>
+          <a:prstGeom prst="rect">
+            <a:avLst/>
+          </a:prstGeom>
+          <a:noFill/>
+        </p:spPr>
+        <p:txBody>
+          <a:bodyPr wrap="square">
+            <a:spAutoFit/>
+          </a:bodyPr>
+          <a:lstStyle/>
+          <a:p>
+            <a:r>
+              <a:rPr lang="es-ES" sz="1200" dirty="0"/>
+              <a:t>Sección transversal del primer modo del </a:t>
+            </a:r>
+            <a:r>
+              <a:rPr lang="es-ES" sz="1200" dirty="0" err="1"/>
+              <a:t>modesolver</a:t>
+            </a:r>
+            <a:r>
+              <a:rPr lang="es-ES" sz="1200" dirty="0"/>
+              <a:t> (TE)</a:t>
+            </a:r>
+          </a:p>
+        </p:txBody>
+      </p:sp>
+      <p:sp>
+        <p:nvSpPr>
+          <p:cNvPr id="13" name="CuadroTexto 12">
+            <a:extLst>
+              <a:ext uri="{FF2B5EF4-FFF2-40B4-BE49-F238E27FC236}">
+                <a16:creationId xmlns:a16="http://schemas.microsoft.com/office/drawing/2014/main" id="{28C561EB-49FD-4380-852E-1DA2141918E3}"/>
+              </a:ext>
+            </a:extLst>
+          </p:cNvPr>
+          <p:cNvSpPr txBox="1"/>
+          <p:nvPr/>
+        </p:nvSpPr>
+        <p:spPr>
+          <a:xfrm>
+            <a:off x="4428067" y="1141311"/>
+            <a:ext cx="3667125" cy="276999"/>
+          </a:xfrm>
+          <a:prstGeom prst="rect">
+            <a:avLst/>
+          </a:prstGeom>
+          <a:noFill/>
+        </p:spPr>
+        <p:txBody>
+          <a:bodyPr wrap="square">
+            <a:spAutoFit/>
+          </a:bodyPr>
+          <a:lstStyle/>
+          <a:p>
+            <a:r>
+              <a:rPr lang="es-ES" sz="1200" dirty="0"/>
+              <a:t>Sección transversal del modo 2 (TE)</a:t>
+            </a:r>
+          </a:p>
+        </p:txBody>
+      </p:sp>
+      <p:sp>
+        <p:nvSpPr>
+          <p:cNvPr id="14" name="CuadroTexto 13">
+            <a:extLst>
+              <a:ext uri="{FF2B5EF4-FFF2-40B4-BE49-F238E27FC236}">
+                <a16:creationId xmlns:a16="http://schemas.microsoft.com/office/drawing/2014/main" id="{6A807AC4-DA9A-4EDA-9FEC-E276A25029AE}"/>
+              </a:ext>
+            </a:extLst>
+          </p:cNvPr>
+          <p:cNvSpPr txBox="1"/>
+          <p:nvPr/>
+        </p:nvSpPr>
+        <p:spPr>
+          <a:xfrm>
+            <a:off x="8060267" y="1143000"/>
+            <a:ext cx="3810000" cy="276999"/>
+          </a:xfrm>
+          <a:prstGeom prst="rect">
+            <a:avLst/>
+          </a:prstGeom>
+          <a:noFill/>
+        </p:spPr>
+        <p:txBody>
+          <a:bodyPr wrap="square">
+            <a:spAutoFit/>
+          </a:bodyPr>
+          <a:lstStyle/>
+          <a:p>
+            <a:r>
+              <a:rPr lang="es-ES" sz="1200" dirty="0"/>
+              <a:t>Sección transversal del modo 8 (TE).</a:t>
+            </a:r>
+          </a:p>
+        </p:txBody>
+      </p:sp>
     </p:spTree>
     <p:extLst>
       <p:ext uri="{BB962C8B-B14F-4D97-AF65-F5344CB8AC3E}">
-        <p14:creationId xmlns:p14="http://schemas.microsoft.com/office/powerpoint/2010/main" val="580800172"/>
+        <p14:creationId xmlns:p14="http://schemas.microsoft.com/office/powerpoint/2010/main" val="4164403782"/>
       </p:ext>
     </p:extLst>
   </p:cSld>

--- a/LabBook_020.pptx
+++ b/LabBook_020.pptx
@@ -5,10 +5,10 @@
     <p:sldMasterId id="2147483648" r:id="rId1"/>
   </p:sldMasterIdLst>
   <p:notesMasterIdLst>
-    <p:notesMasterId r:id="rId13"/>
+    <p:notesMasterId r:id="rId12"/>
   </p:notesMasterIdLst>
   <p:handoutMasterIdLst>
-    <p:handoutMasterId r:id="rId14"/>
+    <p:handoutMasterId r:id="rId13"/>
   </p:handoutMasterIdLst>
   <p:sldIdLst>
     <p:sldId id="256" r:id="rId2"/>
@@ -21,7 +21,6 @@
     <p:sldId id="298" r:id="rId9"/>
     <p:sldId id="299" r:id="rId10"/>
     <p:sldId id="288" r:id="rId11"/>
-    <p:sldId id="294" r:id="rId12"/>
   </p:sldIdLst>
   <p:sldSz cx="12192000" cy="6858000"/>
   <p:notesSz cx="12192000" cy="6858000"/>
@@ -303,7 +302,7 @@
           <a:p>
             <a:fld id="{8438F8DC-35B0-48E6-A86E-42F1F08DD00F}" type="datetimeFigureOut">
               <a:rPr lang="es-ES" smtClean="0"/>
-              <a:t>02/03/2026</a:t>
+              <a:t>2/3/26</a:t>
             </a:fld>
             <a:endParaRPr lang="es-ES"/>
           </a:p>
@@ -480,7 +479,7 @@
           <a:p>
             <a:fld id="{FACBDC12-F39B-4B97-8F4D-6734F9D366FF}" type="datetimeFigureOut">
               <a:rPr lang="es-ES" smtClean="0"/>
-              <a:t>02/03/2026</a:t>
+              <a:t>2/3/26</a:t>
             </a:fld>
             <a:endParaRPr lang="es-ES"/>
           </a:p>
@@ -2698,171 +2697,6 @@
 </p:sld>
 </file>
 
-<file path=ppt/slides/slide11.xml><?xml version="1.0" encoding="utf-8"?>
-<p:sld xmlns:a="http://schemas.openxmlformats.org/drawingml/2006/main" xmlns:r="http://schemas.openxmlformats.org/officeDocument/2006/relationships" xmlns:p="http://schemas.openxmlformats.org/presentationml/2006/main">
-  <p:cSld>
-    <p:spTree>
-      <p:nvGrpSpPr>
-        <p:cNvPr id="1" name=""/>
-        <p:cNvGrpSpPr/>
-        <p:nvPr/>
-      </p:nvGrpSpPr>
-      <p:grpSpPr>
-        <a:xfrm>
-          <a:off x="0" y="0"/>
-          <a:ext cx="0" cy="0"/>
-          <a:chOff x="0" y="0"/>
-          <a:chExt cx="0" cy="0"/>
-        </a:xfrm>
-      </p:grpSpPr>
-      <p:sp>
-        <p:nvSpPr>
-          <p:cNvPr id="2" name="Título 1">
-            <a:extLst>
-              <a:ext uri="{FF2B5EF4-FFF2-40B4-BE49-F238E27FC236}">
-                <a16:creationId xmlns:a16="http://schemas.microsoft.com/office/drawing/2014/main" id="{E7142EF5-74F6-4935-9D72-DB4F48743FFA}"/>
-              </a:ext>
-            </a:extLst>
-          </p:cNvPr>
-          <p:cNvSpPr>
-            <a:spLocks noGrp="1"/>
-          </p:cNvSpPr>
-          <p:nvPr>
-            <p:ph type="title"/>
-          </p:nvPr>
-        </p:nvSpPr>
-        <p:spPr/>
-        <p:txBody>
-          <a:bodyPr/>
-          <a:lstStyle/>
-          <a:p>
-            <a:endParaRPr lang="es-ES"/>
-          </a:p>
-        </p:txBody>
-      </p:sp>
-      <p:sp>
-        <p:nvSpPr>
-          <p:cNvPr id="3" name="Marcador de texto 2">
-            <a:extLst>
-              <a:ext uri="{FF2B5EF4-FFF2-40B4-BE49-F238E27FC236}">
-                <a16:creationId xmlns:a16="http://schemas.microsoft.com/office/drawing/2014/main" id="{92710A37-98E0-4CCF-8EF0-9D8D84970DD9}"/>
-              </a:ext>
-            </a:extLst>
-          </p:cNvPr>
-          <p:cNvSpPr>
-            <a:spLocks noGrp="1"/>
-          </p:cNvSpPr>
-          <p:nvPr>
-            <p:ph type="body" idx="1"/>
-          </p:nvPr>
-        </p:nvSpPr>
-        <p:spPr>
-          <a:xfrm>
-            <a:off x="609600" y="2152910"/>
-            <a:ext cx="10972800" cy="553998"/>
-          </a:xfrm>
-        </p:spPr>
-        <p:txBody>
-          <a:bodyPr/>
-          <a:lstStyle/>
-          <a:p>
-            <a:r>
-              <a:rPr lang="es-ES" sz="1200" dirty="0"/>
-              <a:t>De pendiendo de la distancia  a la que se corta la longitud del MMI se va a tener una autoimagen determinada</a:t>
-            </a:r>
-          </a:p>
-          <a:p>
-            <a:endParaRPr lang="es-ES" sz="1200" dirty="0"/>
-          </a:p>
-          <a:p>
-            <a:r>
-              <a:rPr lang="es-ES" sz="1200" dirty="0"/>
-              <a:t>Calcular …, …, </a:t>
-            </a:r>
-            <a:r>
-              <a:rPr lang="es-ES" sz="1200" dirty="0" err="1"/>
-              <a:t>L_pi</a:t>
-            </a:r>
-            <a:endParaRPr lang="es-ES" sz="1200" dirty="0"/>
-          </a:p>
-        </p:txBody>
-      </p:sp>
-      <p:sp>
-        <p:nvSpPr>
-          <p:cNvPr id="4" name="Marcador de pie de página 3">
-            <a:extLst>
-              <a:ext uri="{FF2B5EF4-FFF2-40B4-BE49-F238E27FC236}">
-                <a16:creationId xmlns:a16="http://schemas.microsoft.com/office/drawing/2014/main" id="{04DDB22E-DB66-41AA-A98E-87234657D449}"/>
-              </a:ext>
-            </a:extLst>
-          </p:cNvPr>
-          <p:cNvSpPr>
-            <a:spLocks noGrp="1"/>
-          </p:cNvSpPr>
-          <p:nvPr>
-            <p:ph type="ftr" sz="quarter" idx="5"/>
-          </p:nvPr>
-        </p:nvSpPr>
-        <p:spPr/>
-        <p:txBody>
-          <a:bodyPr/>
-          <a:lstStyle/>
-          <a:p>
-            <a:pPr marL="12700">
-              <a:spcBef>
-                <a:spcPts val="15"/>
-              </a:spcBef>
-            </a:pPr>
-            <a:r>
-              <a:rPr lang="es-ES" spc="-5"/>
-              <a:t>LAB 0.2. COUPLERS</a:t>
-            </a:r>
-            <a:endParaRPr lang="es-ES" spc="-5" dirty="0"/>
-          </a:p>
-        </p:txBody>
-      </p:sp>
-      <p:sp>
-        <p:nvSpPr>
-          <p:cNvPr id="5" name="Marcador de número de diapositiva 4">
-            <a:extLst>
-              <a:ext uri="{FF2B5EF4-FFF2-40B4-BE49-F238E27FC236}">
-                <a16:creationId xmlns:a16="http://schemas.microsoft.com/office/drawing/2014/main" id="{953D5AE1-CE5A-4543-9BE3-C8AA193522C0}"/>
-              </a:ext>
-            </a:extLst>
-          </p:cNvPr>
-          <p:cNvSpPr>
-            <a:spLocks noGrp="1"/>
-          </p:cNvSpPr>
-          <p:nvPr>
-            <p:ph type="sldNum" sz="quarter" idx="7"/>
-          </p:nvPr>
-        </p:nvSpPr>
-        <p:spPr/>
-        <p:txBody>
-          <a:bodyPr/>
-          <a:lstStyle/>
-          <a:p>
-            <a:fld id="{B6F15528-21DE-4FAA-801E-634DDDAF4B2B}" type="slidenum">
-              <a:rPr lang="es-ES" smtClean="0"/>
-              <a:t>11</a:t>
-            </a:fld>
-            <a:endParaRPr lang="es-ES"/>
-          </a:p>
-        </p:txBody>
-      </p:sp>
-    </p:spTree>
-    <p:extLst>
-      <p:ext uri="{BB962C8B-B14F-4D97-AF65-F5344CB8AC3E}">
-        <p14:creationId xmlns:p14="http://schemas.microsoft.com/office/powerpoint/2010/main" val="580800172"/>
-      </p:ext>
-    </p:extLst>
-  </p:cSld>
-  <p:clrMapOvr>
-    <a:masterClrMapping/>
-  </p:clrMapOvr>
-</p:sld>
-</file>
-
 <file path=ppt/slides/slide2.xml><?xml version="1.0" encoding="utf-8"?>
 <p:sld xmlns:a="http://schemas.openxmlformats.org/drawingml/2006/main" xmlns:r="http://schemas.openxmlformats.org/officeDocument/2006/relationships" xmlns:p="http://schemas.openxmlformats.org/presentationml/2006/main">
   <p:cSld>
@@ -5362,8 +5196,8 @@
           </p:sp>
         </mc:Fallback>
       </mc:AlternateContent>
-      <mc:AlternateContent xmlns:mc="http://schemas.openxmlformats.org/markup-compatibility/2006">
-        <mc:Choice xmlns:a14="http://schemas.microsoft.com/office/drawing/2010/main" Requires="a14">
+      <mc:AlternateContent xmlns:mc="http://schemas.openxmlformats.org/markup-compatibility/2006" xmlns:a14="http://schemas.microsoft.com/office/drawing/2010/main">
+        <mc:Choice Requires="a14">
           <p:sp>
             <p:nvSpPr>
               <p:cNvPr id="2" name="CuadroTexto 1">
@@ -5810,7 +5644,7 @@
             </p:txBody>
           </p:sp>
         </mc:Choice>
-        <mc:Fallback>
+        <mc:Fallback xmlns="">
           <p:sp>
             <p:nvSpPr>
               <p:cNvPr id="2" name="CuadroTexto 1">
@@ -6341,13 +6175,15 @@
           <a:p>
             <a:r>
               <a:rPr lang="es-ES" sz="1200" dirty="0"/>
-              <a:t>Sección transversal del primer modo, correspondiente </a:t>
-            </a:r>
-          </a:p>
-          <a:p>
+              <a:t>Sección transversal del primer modo del </a:t>
+            </a:r>
+            <a:r>
+              <a:rPr lang="es-ES" sz="1200" dirty="0" err="1"/>
+              <a:t>modesolver</a:t>
+            </a:r>
             <a:r>
               <a:rPr lang="es-ES" sz="1200" dirty="0"/>
-              <a:t>al </a:t>
+              <a:t>, correspondiente al </a:t>
             </a:r>
             <a:r>
               <a:rPr lang="es-ES" sz="1200" dirty="0" err="1"/>
@@ -6355,7 +6191,7 @@
             </a:r>
             <a:r>
               <a:rPr lang="es-ES" sz="1200" dirty="0"/>
-              <a:t> par (simétrico):</a:t>
+              <a:t> par (simétrico) (TE):</a:t>
             </a:r>
           </a:p>
         </p:txBody>
@@ -6404,7 +6240,7 @@
             </a:r>
             <a:r>
               <a:rPr lang="es-ES" sz="1200" dirty="0"/>
-              <a:t> impar (antisimétrico), donde el campo eléctrico oscila en contrafase:</a:t>
+              <a:t> impar (antisimétrico) (TE), donde el campo eléctrico oscila en contrafase:</a:t>
             </a:r>
           </a:p>
         </p:txBody>
@@ -6572,7 +6408,7 @@
           <a:p>
             <a:r>
               <a:rPr lang="es-ES" sz="1200" dirty="0"/>
-              <a:t>A continuación se va a mostrar la sección transversal de los modos. En la parte de arriba se muestra el análisis del modo TE y en la parte de abajo el modo TM. </a:t>
+              <a:t>A continuación se muestra la sección transversal de los modos. En la parte de arriba se muestra el análisis del modo TE y en la parte de abajo el modo TM. </a:t>
             </a:r>
           </a:p>
         </p:txBody>
@@ -6779,8 +6615,8 @@
         </p:nvSpPr>
         <p:spPr>
           <a:xfrm>
-            <a:off x="4343400" y="1050571"/>
-            <a:ext cx="3810000" cy="276999"/>
+            <a:off x="4088004" y="992217"/>
+            <a:ext cx="3810000" cy="1015663"/>
           </a:xfrm>
           <a:prstGeom prst="rect">
             <a:avLst/>
@@ -6795,7 +6631,7 @@
           <a:p>
             <a:r>
               <a:rPr lang="es-ES" sz="1200" dirty="0"/>
-              <a:t>Sección transversal del quinto modo:</a:t>
+              <a:t>Sección transversal del quinto modo. Se trata de un modo TE de orden superior que presenta tres lóbulos definidos en su componente horizontal. A diferencia del modo siguiente, este sí se encuentra confinado dentro de la estructura y se propaga.</a:t>
             </a:r>
           </a:p>
         </p:txBody>
@@ -7540,8 +7376,8 @@
           </p:sp>
         </mc:Fallback>
       </mc:AlternateContent>
-      <mc:AlternateContent xmlns:mc="http://schemas.openxmlformats.org/markup-compatibility/2006">
-        <mc:Choice xmlns:a14="http://schemas.microsoft.com/office/drawing/2010/main" Requires="a14">
+      <mc:AlternateContent xmlns:mc="http://schemas.openxmlformats.org/markup-compatibility/2006" xmlns:a14="http://schemas.microsoft.com/office/drawing/2010/main">
+        <mc:Choice Requires="a14">
           <p:sp>
             <p:nvSpPr>
               <p:cNvPr id="2" name="CuadroTexto 1">
@@ -8071,7 +7907,7 @@
             </p:txBody>
           </p:sp>
         </mc:Choice>
-        <mc:Fallback>
+        <mc:Fallback xmlns="">
           <p:sp>
             <p:nvSpPr>
               <p:cNvPr id="2" name="CuadroTexto 1">
